--- a/examples/breezehome/out/deck.pptx
+++ b/examples/breezehome/out/deck.pptx
@@ -1800,7 +1800,7 @@
                 <a:ea typeface="Pretendard Light" pitchFamily="34" charset="-122"/>
                 <a:cs typeface="Pretendard Light" pitchFamily="34" charset="-120"/>
               </a:rPr>
-              <a:t>매출 · ROAS · 신규 고객 · 도달 및 채널별 성과</a:t>
+              <a:t>매출 · ROAS · 신규 고객 · 도달 및 채널별 성과</a:t>
             </a:r>
             <a:endParaRPr lang="en-US" sz="1800" dirty="0"/>
           </a:p>
@@ -1842,7 +1842,7 @@
                 <a:ea typeface="Paperlogy 7 Bold" pitchFamily="34" charset="-122"/>
                 <a:cs typeface="Paperlogy 7 Bold" pitchFamily="34" charset="-120"/>
               </a:rPr>
-              <a:t>브리즈홈 8월 마케팅 성과 보고</a:t>
+              <a:t>브리즈홈 8월 마케팅 성과 보고</a:t>
             </a:r>
             <a:endParaRPr lang="en-US" sz="4800" dirty="0"/>
           </a:p>
@@ -1850,7 +1850,7 @@
       </p:sp>
       <p:pic>
         <p:nvPicPr>
-          <p:cNvPr id="4" name="Image 0" descr="image">    </p:cNvPr>
+          <p:cNvPr id="4" name="Image 0" descr="logo_h_white.png">    </p:cNvPr>
           <p:cNvPicPr>
             <a:picLocks noChangeAspect="1"/>
           </p:cNvPicPr>
@@ -1927,7 +1927,7 @@
                 <a:ea typeface="Pretendard" pitchFamily="34" charset="-122"/>
                 <a:cs typeface="Pretendard" pitchFamily="34" charset="-120"/>
               </a:rPr>
-              <a:t>브리즈홈 마케팅 월간 보고</a:t>
+              <a:t>브리즈홈 마케팅 월간 보고</a:t>
             </a:r>
             <a:endParaRPr lang="en-US" sz="1400" dirty="0"/>
           </a:p>
@@ -2382,7 +2382,7 @@
                 <a:ea typeface="Pretendard" pitchFamily="34" charset="-122"/>
                 <a:cs typeface="Pretendard" pitchFamily="34" charset="-120"/>
               </a:rPr>
-              <a:t>2억 7,500만 원</a:t>
+              <a:t>2억 7,500만 원</a:t>
             </a:r>
             <a:endParaRPr lang="en-US" sz="1060" dirty="0"/>
           </a:p>
@@ -2516,7 +2516,7 @@
                 <a:ea typeface="Pretendard" pitchFamily="34" charset="-122"/>
                 <a:cs typeface="Pretendard" pitchFamily="34" charset="-120"/>
               </a:rPr>
-              <a:t>3억 2,400만 원</a:t>
+              <a:t>3억 2,400만 원</a:t>
             </a:r>
             <a:endParaRPr lang="en-US" sz="1060" dirty="0"/>
           </a:p>
@@ -2622,7 +2622,7 @@
                 <a:ea typeface="Pretendard" pitchFamily="34" charset="-122"/>
                 <a:cs typeface="Pretendard" pitchFamily="34" charset="-120"/>
               </a:rPr>
-              <a:t>18% 증가</a:t>
+              <a:t>18% 증가</a:t>
             </a:r>
             <a:endParaRPr lang="en-US" sz="1790" dirty="0"/>
           </a:p>
@@ -2686,7 +2686,7 @@
                 <a:ea typeface="Pretendard" pitchFamily="34" charset="-122"/>
                 <a:cs typeface="Pretendard" pitchFamily="34" charset="-120"/>
               </a:rPr>
-              <a:t>신규 고객</a:t>
+              <a:t>신규 고객</a:t>
             </a:r>
             <a:endParaRPr lang="en-US" sz="1190" dirty="0"/>
           </a:p>
@@ -3089,7 +3089,7 @@
                 <a:ea typeface="Pretendard" pitchFamily="34" charset="-122"/>
                 <a:cs typeface="Pretendard" pitchFamily="34" charset="-120"/>
               </a:rPr>
-              <a:t>11% 증가</a:t>
+              <a:t>11% 증가</a:t>
             </a:r>
             <a:endParaRPr lang="en-US" sz="1790" dirty="0"/>
           </a:p>
@@ -3316,7 +3316,7 @@
                 <a:ea typeface="Pretendard" pitchFamily="34" charset="-122"/>
                 <a:cs typeface="Pretendard" pitchFamily="34" charset="-120"/>
               </a:rPr>
-              <a:t>172만 명</a:t>
+              <a:t>172만 명</a:t>
             </a:r>
             <a:endParaRPr lang="en-US" sz="1060" dirty="0"/>
           </a:p>
@@ -3450,7 +3450,7 @@
                 <a:ea typeface="Pretendard" pitchFamily="34" charset="-122"/>
                 <a:cs typeface="Pretendard" pitchFamily="34" charset="-120"/>
               </a:rPr>
-              <a:t>187만 명</a:t>
+              <a:t>187만 명</a:t>
             </a:r>
             <a:endParaRPr lang="en-US" sz="1060" dirty="0"/>
           </a:p>
@@ -3556,7 +3556,7 @@
                 <a:ea typeface="Pretendard" pitchFamily="34" charset="-122"/>
                 <a:cs typeface="Pretendard" pitchFamily="34" charset="-120"/>
               </a:rPr>
-              <a:t>9% 증가</a:t>
+              <a:t>9% 증가</a:t>
             </a:r>
             <a:endParaRPr lang="en-US" sz="1790" dirty="0"/>
           </a:p>
@@ -4023,7 +4023,7 @@
                 <a:ea typeface="Pretendard" pitchFamily="34" charset="-122"/>
                 <a:cs typeface="Pretendard" pitchFamily="34" charset="-120"/>
               </a:rPr>
-              <a:t>8% 초과</a:t>
+              <a:t>8% 초과</a:t>
             </a:r>
             <a:endParaRPr lang="en-US" sz="1790" dirty="0"/>
           </a:p>
@@ -4140,7 +4140,7 @@
                 <a:ea typeface="Pretendard" pitchFamily="34" charset="-122"/>
                 <a:cs typeface="Pretendard" pitchFamily="34" charset="-120"/>
               </a:rPr>
-              <a:t>성수기 막바지 프로모션과 신제품 미니 제습기 출시 효과가 맞물리며 주요 지표가 모두 목표치 초과 달성</a:t>
+              <a:t>성수기 막바지 프로모션과 신제품 미니 제습기 출시 효과가 맞물리며 주요 지표가 모두 목표치 초과 달성</a:t>
             </a:r>
             <a:endParaRPr lang="en-US" sz="980" dirty="0"/>
           </a:p>
@@ -4161,7 +4161,7 @@
                 <a:ea typeface="Pretendard" pitchFamily="34" charset="-122"/>
                 <a:cs typeface="Pretendard" pitchFamily="34" charset="-120"/>
               </a:rPr>
-              <a:t>특정 채널에 편중되지 않고 유튜브, 인스타그램, 블로그 세 채널이 고르게 성장</a:t>
+              <a:t>특정 채널에 편중되지 않고 유튜브, 인스타그램, 블로그 세 채널이 고르게 성장</a:t>
             </a:r>
             <a:endParaRPr lang="en-US" sz="980" dirty="0"/>
           </a:p>
@@ -4647,7 +4647,7 @@
                 <a:ea typeface="Pretendard" pitchFamily="34" charset="-122"/>
                 <a:cs typeface="Pretendard" pitchFamily="34" charset="-120"/>
               </a:rPr>
-              <a:t>전월 31만 회 · 전월 대비 35% 성장</a:t>
+              <a:t>전월 31만 회 · 전월 대비 35% 성장</a:t>
             </a:r>
             <a:endParaRPr lang="en-US" sz="1050" dirty="0"/>
           </a:p>
@@ -4711,7 +4711,7 @@
                 <a:ea typeface="Pretendard" pitchFamily="34" charset="-122"/>
                 <a:cs typeface="Pretendard" pitchFamily="34" charset="-120"/>
               </a:rPr>
-              <a:t>월별 조회수 추이</a:t>
+              <a:t>월별 조회수 추이</a:t>
             </a:r>
             <a:endParaRPr lang="en-US" sz="1180" dirty="0"/>
           </a:p>
@@ -4753,7 +4753,7 @@
                 <a:ea typeface="Pretendard" pitchFamily="34" charset="-122"/>
                 <a:cs typeface="Pretendard" pitchFamily="34" charset="-120"/>
               </a:rPr>
-              <a:t>단위 : 만 회</a:t>
+              <a:t>단위 : 만 회</a:t>
             </a:r>
             <a:endParaRPr lang="en-US" sz="1050" dirty="0"/>
           </a:p>
@@ -4833,7 +4833,7 @@
                 <a:ea typeface="Pretendard" pitchFamily="34" charset="-122"/>
                 <a:cs typeface="Pretendard" pitchFamily="34" charset="-120"/>
               </a:rPr>
-              <a:t>주요 성과</a:t>
+              <a:t>주요 성과</a:t>
             </a:r>
             <a:endParaRPr lang="en-US" sz="1280" dirty="0"/>
           </a:p>
@@ -4904,7 +4904,7 @@
                 <a:ea typeface="Pretendard" pitchFamily="34" charset="-122"/>
                 <a:cs typeface="Pretendard" pitchFamily="34" charset="-120"/>
               </a:rPr>
-              <a:t>채널 전체</a:t>
+              <a:t>채널 전체</a:t>
             </a:r>
             <a:endParaRPr lang="en-US" sz="1110" dirty="0"/>
           </a:p>
@@ -4950,7 +4950,7 @@
                 <a:ea typeface="Pretendard" pitchFamily="34" charset="-122"/>
                 <a:cs typeface="Pretendard" pitchFamily="34" charset="-120"/>
               </a:rPr>
-              <a:t>구독자 1,200명 증가해 2.8만 명 달성</a:t>
+              <a:t>구독자 1,200명 증가해 2.8만 명 달성</a:t>
             </a:r>
             <a:endParaRPr lang="en-US" sz="1180" dirty="0"/>
           </a:p>
@@ -4971,7 +4971,7 @@
                 <a:ea typeface="Pretendard" pitchFamily="34" charset="-122"/>
                 <a:cs typeface="Pretendard" pitchFamily="34" charset="-120"/>
               </a:rPr>
-              <a:t>제품 상세페이지 유입의 38%가 유튜브를 경유</a:t>
+              <a:t>제품 상세페이지 유입의 38%가 유튜브를 경유</a:t>
             </a:r>
             <a:endParaRPr lang="en-US" sz="1180" dirty="0"/>
           </a:p>
@@ -5079,7 +5079,7 @@
                 <a:ea typeface="Pretendard" pitchFamily="34" charset="-122"/>
                 <a:cs typeface="Pretendard" pitchFamily="34" charset="-120"/>
               </a:rPr>
-              <a:t>신제품 미니 제습기 언박싱 영상 *8월 7일 게시</a:t>
+              <a:t>신제품 미니 제습기 언박싱 영상 *8월 7일 게시</a:t>
             </a:r>
             <a:endParaRPr lang="en-US" sz="1180" dirty="0"/>
           </a:p>
@@ -5103,7 +5103,7 @@
                 <a:ea typeface="Pretendard" pitchFamily="34" charset="-122"/>
                 <a:cs typeface="Pretendard" pitchFamily="34" charset="-120"/>
               </a:rPr>
-              <a:t>조회수 12만 회로 채널 역대 2위 기록</a:t>
+              <a:t>조회수 12만 회로 채널 역대 2위 기록</a:t>
             </a:r>
             <a:endParaRPr lang="en-US" sz="1180" dirty="0"/>
           </a:p>
@@ -5124,7 +5124,7 @@
                 <a:ea typeface="Pretendard" pitchFamily="34" charset="-122"/>
                 <a:cs typeface="Pretendard" pitchFamily="34" charset="-120"/>
               </a:rPr>
-              <a:t>좋아요 4,300개, 구매 전환 214건 달성</a:t>
+              <a:t>좋아요 4,300개, 구매 전환 214건 달성</a:t>
             </a:r>
             <a:endParaRPr lang="en-US" sz="1180" dirty="0"/>
           </a:p>
@@ -5241,7 +5241,7 @@
                 <a:ea typeface="Pretendard" pitchFamily="34" charset="-122"/>
                 <a:cs typeface="Pretendard" pitchFamily="34" charset="-120"/>
               </a:rPr>
-              <a:t>장마가 끝난 직후 습기 고민이 정점에 달하는 타이밍에 게시된 점과 실사용 비교 중심의 구성이 주효</a:t>
+              <a:t>장마가 끝난 직후 습기 고민이 정점에 달하는 타이밍에 게시된 점과 실사용 비교 중심의 구성이 주효</a:t>
             </a:r>
             <a:endParaRPr lang="en-US" sz="1050" dirty="0"/>
           </a:p>
@@ -5262,7 +5262,7 @@
                 <a:ea typeface="Pretendard" pitchFamily="34" charset="-122"/>
                 <a:cs typeface="Pretendard" pitchFamily="34" charset="-120"/>
               </a:rPr>
-              <a:t>유튜브가 구매 여정에서 차지하는 비중 확인</a:t>
+              <a:t>유튜브가 구매 여정에서 차지하는 비중 확인</a:t>
             </a:r>
             <a:endParaRPr lang="en-US" sz="1050" dirty="0"/>
           </a:p>
@@ -5653,7 +5653,7 @@
                 <a:ea typeface="Pretendard" pitchFamily="34" charset="-122"/>
                 <a:cs typeface="Pretendard" pitchFamily="34" charset="-120"/>
               </a:rPr>
-              <a:t>도달 계정</a:t>
+              <a:t>도달 계정</a:t>
             </a:r>
             <a:endParaRPr lang="en-US" sz="1050" dirty="0"/>
           </a:p>
@@ -5748,7 +5748,7 @@
                 <a:ea typeface="Pretendard" pitchFamily="34" charset="-122"/>
                 <a:cs typeface="Pretendard" pitchFamily="34" charset="-120"/>
               </a:rPr>
-              <a:t>전월 49만 명 · 전월 대비 18% 성장</a:t>
+              <a:t>전월 49만 명 · 전월 대비 18% 성장</a:t>
             </a:r>
             <a:endParaRPr lang="en-US" sz="1050" dirty="0"/>
           </a:p>
@@ -5812,7 +5812,7 @@
                 <a:ea typeface="Pretendard" pitchFamily="34" charset="-122"/>
                 <a:cs typeface="Pretendard" pitchFamily="34" charset="-120"/>
               </a:rPr>
-              <a:t>월별 도달 추이</a:t>
+              <a:t>월별 도달 추이</a:t>
             </a:r>
             <a:endParaRPr lang="en-US" sz="1180" dirty="0"/>
           </a:p>
@@ -5854,7 +5854,7 @@
                 <a:ea typeface="Pretendard" pitchFamily="34" charset="-122"/>
                 <a:cs typeface="Pretendard" pitchFamily="34" charset="-120"/>
               </a:rPr>
-              <a:t>단위 : 만 명</a:t>
+              <a:t>단위 : 만 명</a:t>
             </a:r>
             <a:endParaRPr lang="en-US" sz="1050" dirty="0"/>
           </a:p>
@@ -5934,7 +5934,7 @@
                 <a:ea typeface="Pretendard" pitchFamily="34" charset="-122"/>
                 <a:cs typeface="Pretendard" pitchFamily="34" charset="-120"/>
               </a:rPr>
-              <a:t>주요 성과</a:t>
+              <a:t>주요 성과</a:t>
             </a:r>
             <a:endParaRPr lang="en-US" sz="1280" dirty="0"/>
           </a:p>
@@ -6005,7 +6005,7 @@
                 <a:ea typeface="Pretendard" pitchFamily="34" charset="-122"/>
                 <a:cs typeface="Pretendard" pitchFamily="34" charset="-120"/>
               </a:rPr>
-              <a:t>채널 전체</a:t>
+              <a:t>채널 전체</a:t>
             </a:r>
             <a:endParaRPr lang="en-US" sz="1110" dirty="0"/>
           </a:p>
@@ -6051,7 +6051,7 @@
                 <a:ea typeface="Pretendard" pitchFamily="34" charset="-122"/>
                 <a:cs typeface="Pretendard" pitchFamily="34" charset="-120"/>
               </a:rPr>
-              <a:t>팔로워 2,100명 순증 · 누적 3.6만 명</a:t>
+              <a:t>팔로워 2,100명 순증 · 누적 3.6만 명</a:t>
             </a:r>
             <a:endParaRPr lang="en-US" sz="1180" dirty="0"/>
           </a:p>
@@ -6180,7 +6180,7 @@
                 <a:ea typeface="Pretendard" pitchFamily="34" charset="-122"/>
                 <a:cs typeface="Pretendard" pitchFamily="34" charset="-120"/>
               </a:rPr>
-              <a:t>‘장마 끝, 곰팡이 전쟁’ 릴스 *8월 12일 게시</a:t>
+              <a:t>‘장마 끝, 곰팡이 전쟁’ 릴스 *8월 12일 게시</a:t>
             </a:r>
             <a:endParaRPr lang="en-US" sz="1180" dirty="0"/>
           </a:p>
@@ -6225,7 +6225,7 @@
                 <a:ea typeface="Pretendard" pitchFamily="34" charset="-122"/>
                 <a:cs typeface="Pretendard" pitchFamily="34" charset="-120"/>
               </a:rPr>
-              <a:t>댓글 참여율 6.2%로 채널 최고</a:t>
+              <a:t>댓글 참여율 6.2%로 채널 최고</a:t>
             </a:r>
             <a:endParaRPr lang="en-US" sz="1180" dirty="0"/>
           </a:p>
@@ -6342,7 +6342,7 @@
                 <a:ea typeface="Pretendard" pitchFamily="34" charset="-122"/>
                 <a:cs typeface="Pretendard" pitchFamily="34" charset="-120"/>
               </a:rPr>
-              <a:t>저장·공유 중심의 실용 정보형 릴스가 도달 확대를 견인</a:t>
+              <a:t>저장·공유 중심의 실용 정보형 릴스가 도달 확대를 견인</a:t>
             </a:r>
             <a:endParaRPr lang="en-US" sz="1050" dirty="0"/>
           </a:p>
@@ -6363,7 +6363,7 @@
                 <a:ea typeface="Pretendard" pitchFamily="34" charset="-122"/>
                 <a:cs typeface="Pretendard" pitchFamily="34" charset="-120"/>
               </a:rPr>
-              <a:t>[입력 필요: 9월 협업 크리에이터 일정]</a:t>
+              <a:t>[입력 필요: 9월 협업 크리에이터 일정]</a:t>
             </a:r>
             <a:endParaRPr lang="en-US" sz="1050" dirty="0"/>
           </a:p>
@@ -6410,7 +6410,7 @@
       </p:grpSpPr>
       <p:pic>
         <p:nvPicPr>
-          <p:cNvPr id="2" name="Image 0" descr="image">    </p:cNvPr>
+          <p:cNvPr id="2" name="Image 0" descr="로고">    </p:cNvPr>
           <p:cNvPicPr>
             <a:picLocks noChangeAspect="1"/>
           </p:cNvPicPr>
@@ -6489,7 +6489,7 @@
                 <a:ea typeface="Pretendard" pitchFamily="34" charset="-122"/>
                 <a:cs typeface="Pretendard" pitchFamily="34" charset="-120"/>
               </a:rPr>
-              <a:t>월간 보고</a:t>
+              <a:t>월간 보고</a:t>
             </a:r>
             <a:endParaRPr lang="en-US" sz="900" dirty="0"/>
           </a:p>
@@ -6531,7 +6531,7 @@
                 <a:ea typeface="Pretendard" pitchFamily="34" charset="-122"/>
                 <a:cs typeface="Pretendard" pitchFamily="34" charset="-120"/>
               </a:rPr>
-              <a:t>브리즈홈 마케팅 월간 보고</a:t>
+              <a:t>브리즈홈 마케팅 월간 보고</a:t>
             </a:r>
             <a:endParaRPr lang="en-US" sz="1280" dirty="0"/>
           </a:p>
@@ -6612,7 +6612,7 @@
                 <a:ea typeface="Pretendard" pitchFamily="34" charset="-122"/>
                 <a:cs typeface="Pretendard" pitchFamily="34" charset="-120"/>
               </a:rPr>
-              <a:t>브리즈홈 마케팅팀 · 2026년 8월 성과 보고</a:t>
+              <a:t>브리즈홈 마케팅팀 · 2026년 8월 성과 보고</a:t>
             </a:r>
             <a:endParaRPr lang="en-US" sz="1500" dirty="0"/>
           </a:p>
@@ -6758,7 +6758,7 @@
                 <a:ea typeface="Pretendard" pitchFamily="34" charset="-122"/>
                 <a:cs typeface="Pretendard" pitchFamily="34" charset="-120"/>
               </a:rPr>
-              <a:t>집계 기간</a:t>
+              <a:t>집계 기간</a:t>
             </a:r>
             <a:endParaRPr lang="en-US" sz="680" dirty="0"/>
           </a:p>

--- a/examples/breezehome/out/deck.pptx
+++ b/examples/breezehome/out/deck.pptx
@@ -156,7 +156,7 @@
               <a:lstStyle/>
               <a:p>
                 <a:pPr>
-                  <a:defRPr b="1" i="0" strike="noStrike" sz="960" u="none">
+                  <a:defRPr b="1" i="0" strike="noStrike" sz="750" u="none">
                     <a:solidFill>
                       <a:srgbClr val="1A2438"/>
                     </a:solidFill>
@@ -243,7 +243,7 @@
             <a:lstStyle/>
             <a:p>
               <a:pPr>
-                <a:defRPr b="1" i="0" strike="noStrike" sz="960" u="none">
+                <a:defRPr b="1" i="0" strike="noStrike" sz="750" u="none">
                   <a:solidFill>
                     <a:srgbClr val="1A2438"/>
                   </a:solidFill>
@@ -291,7 +291,7 @@
           <a:lstStyle/>
           <a:p>
             <a:pPr>
-              <a:defRPr sz="960" b="0" i="0" u="none" strike="noStrike">
+              <a:defRPr sz="750" b="0" i="0" u="none" strike="noStrike">
                 <a:solidFill>
                   <a:srgbClr val="4A5568"/>
                 </a:solidFill>
@@ -419,7 +419,7 @@
               <a:lstStyle/>
               <a:p>
                 <a:pPr>
-                  <a:defRPr b="1" i="0" strike="noStrike" sz="960" u="none">
+                  <a:defRPr b="1" i="0" strike="noStrike" sz="750" u="none">
                     <a:solidFill>
                       <a:srgbClr val="1A2438"/>
                     </a:solidFill>
@@ -506,7 +506,7 @@
             <a:lstStyle/>
             <a:p>
               <a:pPr>
-                <a:defRPr b="1" i="0" strike="noStrike" sz="960" u="none">
+                <a:defRPr b="1" i="0" strike="noStrike" sz="750" u="none">
                   <a:solidFill>
                     <a:srgbClr val="1A2438"/>
                   </a:solidFill>
@@ -554,7 +554,7 @@
           <a:lstStyle/>
           <a:p>
             <a:pPr>
-              <a:defRPr sz="960" b="0" i="0" u="none" strike="noStrike">
+              <a:defRPr sz="750" b="0" i="0" u="none" strike="noStrike">
                 <a:solidFill>
                   <a:srgbClr val="4A5568"/>
                 </a:solidFill>
@@ -2032,7 +2032,7 @@
               <a:buNone/>
             </a:pPr>
             <a:r>
-              <a:rPr lang="en-US" sz="1050" spc="-80" kern="0" dirty="0">
+              <a:rPr lang="en-US" sz="980" spc="-80" kern="0" dirty="0">
                 <a:solidFill>
                   <a:srgbClr val="8B95A7"/>
                 </a:solidFill>
@@ -2042,7 +2042,7 @@
               </a:rPr>
               <a:t>2</a:t>
             </a:r>
-            <a:endParaRPr lang="en-US" sz="1050" dirty="0"/>
+            <a:endParaRPr lang="en-US" sz="980" dirty="0"/>
           </a:p>
         </p:txBody>
       </p:sp>
@@ -2055,7 +2055,7 @@
         <p:spPr>
           <a:xfrm>
             <a:off x="381030" y="581010"/>
-            <a:ext cx="10477470" cy="400050"/>
+            <a:ext cx="10477470" cy="485821"/>
           </a:xfrm>
           <a:prstGeom prst="rect">
             <a:avLst/>
@@ -2071,7 +2071,7 @@
               <a:buNone/>
             </a:pPr>
             <a:r>
-              <a:rPr lang="en-US" sz="2600" spc="-80" kern="0" dirty="0">
+              <a:rPr lang="en-US" sz="3150" spc="-80" kern="0" dirty="0">
                 <a:solidFill>
                   <a:srgbClr val="10141C"/>
                 </a:solidFill>
@@ -2085,7 +2085,7 @@
               <a:buNone/>
             </a:pPr>
             <a:r>
-              <a:rPr lang="en-US" sz="2600" spc="-80" kern="0" dirty="0">
+              <a:rPr lang="en-US" sz="3150" spc="-80" kern="0" dirty="0">
                 <a:solidFill>
                   <a:srgbClr val="10141C"/>
                 </a:solidFill>
@@ -2095,7 +2095,7 @@
               </a:rPr>
               <a:t>8월 목표치를 초과 달성</a:t>
             </a:r>
-            <a:endParaRPr lang="en-US" sz="2600" dirty="0"/>
+            <a:endParaRPr lang="en-US" sz="3150" dirty="0"/>
           </a:p>
         </p:txBody>
       </p:sp>
@@ -2169,12 +2169,12 @@
         </p:nvSpPr>
         <p:spPr>
           <a:xfrm>
-            <a:off x="381030" y="2495580"/>
-            <a:ext cx="5611490" cy="294254"/>
+            <a:off x="381030" y="2095530"/>
+            <a:ext cx="5632521" cy="435437"/>
           </a:xfrm>
           <a:prstGeom prst="roundRect">
             <a:avLst>
-              <a:gd name="adj" fmla="val 49907"/>
+              <a:gd name="adj" fmla="val 49895"/>
             </a:avLst>
           </a:prstGeom>
           <a:solidFill>
@@ -2191,8 +2191,8 @@
         </p:nvSpPr>
         <p:spPr>
           <a:xfrm>
-            <a:off x="381030" y="2495580"/>
-            <a:ext cx="5611490" cy="294254"/>
+            <a:off x="381030" y="2095530"/>
+            <a:ext cx="5632521" cy="435437"/>
           </a:xfrm>
           <a:prstGeom prst="rect">
             <a:avLst/>
@@ -2211,7 +2211,7 @@
               <a:buNone/>
             </a:pPr>
             <a:r>
-              <a:rPr lang="en-US" sz="1190" b="1" spc="-80" kern="0" dirty="0">
+              <a:rPr lang="en-US" sz="1760" b="1" spc="-80" kern="0" dirty="0">
                 <a:solidFill>
                   <a:srgbClr val="FFFFFF"/>
                 </a:solidFill>
@@ -2221,7 +2221,7 @@
               </a:rPr>
               <a:t>매출</a:t>
             </a:r>
-            <a:endParaRPr lang="en-US" sz="1190" dirty="0"/>
+            <a:endParaRPr lang="en-US" sz="1760" dirty="0"/>
           </a:p>
         </p:txBody>
       </p:sp>
@@ -2233,12 +2233,12 @@
         </p:nvSpPr>
         <p:spPr>
           <a:xfrm>
-            <a:off x="381030" y="2831805"/>
-            <a:ext cx="5611490" cy="1188629"/>
+            <a:off x="381030" y="2577236"/>
+            <a:ext cx="5632521" cy="1247242"/>
           </a:xfrm>
           <a:prstGeom prst="roundRect">
             <a:avLst>
-              <a:gd name="adj" fmla="val 17632"/>
+              <a:gd name="adj" fmla="val 14509"/>
             </a:avLst>
           </a:prstGeom>
           <a:solidFill>
@@ -2262,8 +2262,8 @@
         </p:nvSpPr>
         <p:spPr>
           <a:xfrm>
-            <a:off x="577169" y="3065617"/>
-            <a:ext cx="1119683" cy="357073"/>
+            <a:off x="597378" y="2832903"/>
+            <a:ext cx="1111453" cy="364114"/>
           </a:xfrm>
           <a:prstGeom prst="rect">
             <a:avLst/>
@@ -2287,8 +2287,8 @@
         </p:nvSpPr>
         <p:spPr>
           <a:xfrm>
-            <a:off x="684977" y="3065617"/>
-            <a:ext cx="904067" cy="357073"/>
+            <a:off x="707380" y="2832903"/>
+            <a:ext cx="891631" cy="364114"/>
           </a:xfrm>
           <a:prstGeom prst="rect">
             <a:avLst/>
@@ -2307,7 +2307,7 @@
               <a:buNone/>
             </a:pPr>
             <a:r>
-              <a:rPr lang="en-US" sz="1060" b="1" spc="-80" kern="0" dirty="0">
+              <a:rPr lang="en-US" sz="1080" b="1" spc="-80" kern="0" dirty="0">
                 <a:solidFill>
                   <a:srgbClr val="1A2438"/>
                 </a:solidFill>
@@ -2317,7 +2317,7 @@
               </a:rPr>
               <a:t>7월</a:t>
             </a:r>
-            <a:endParaRPr lang="en-US" sz="1060" dirty="0"/>
+            <a:endParaRPr lang="en-US" sz="1080" dirty="0"/>
           </a:p>
         </p:txBody>
       </p:sp>
@@ -2329,8 +2329,8 @@
         </p:nvSpPr>
         <p:spPr>
           <a:xfrm>
-            <a:off x="1696852" y="3065617"/>
-            <a:ext cx="1826788" cy="357073"/>
+            <a:off x="1708922" y="2832903"/>
+            <a:ext cx="1813438" cy="364114"/>
           </a:xfrm>
           <a:prstGeom prst="rect">
             <a:avLst/>
@@ -2354,8 +2354,8 @@
         </p:nvSpPr>
         <p:spPr>
           <a:xfrm>
-            <a:off x="1804568" y="3065617"/>
-            <a:ext cx="1611264" cy="357073"/>
+            <a:off x="1818833" y="2832903"/>
+            <a:ext cx="1593616" cy="364114"/>
           </a:xfrm>
           <a:prstGeom prst="rect">
             <a:avLst/>
@@ -2374,7 +2374,7 @@
               <a:buNone/>
             </a:pPr>
             <a:r>
-              <a:rPr lang="en-US" sz="1060" spc="-80" kern="0" dirty="0">
+              <a:rPr lang="en-US" sz="1080" spc="-80" kern="0" dirty="0">
                 <a:solidFill>
                   <a:srgbClr val="1A2438"/>
                 </a:solidFill>
@@ -2384,7 +2384,7 @@
               </a:rPr>
               <a:t>2억 7,500만 원</a:t>
             </a:r>
-            <a:endParaRPr lang="en-US" sz="1060" dirty="0"/>
+            <a:endParaRPr lang="en-US" sz="1080" dirty="0"/>
           </a:p>
         </p:txBody>
       </p:sp>
@@ -2396,8 +2396,8 @@
         </p:nvSpPr>
         <p:spPr>
           <a:xfrm>
-            <a:off x="577169" y="3422599"/>
-            <a:ext cx="1119683" cy="357073"/>
+            <a:off x="597378" y="3197017"/>
+            <a:ext cx="1111453" cy="364114"/>
           </a:xfrm>
           <a:prstGeom prst="rect">
             <a:avLst/>
@@ -2421,8 +2421,8 @@
         </p:nvSpPr>
         <p:spPr>
           <a:xfrm>
-            <a:off x="684977" y="3422599"/>
-            <a:ext cx="904067" cy="357073"/>
+            <a:off x="707380" y="3197017"/>
+            <a:ext cx="891631" cy="364114"/>
           </a:xfrm>
           <a:prstGeom prst="rect">
             <a:avLst/>
@@ -2441,7 +2441,7 @@
               <a:buNone/>
             </a:pPr>
             <a:r>
-              <a:rPr lang="en-US" sz="1060" b="1" spc="-80" kern="0" dirty="0">
+              <a:rPr lang="en-US" sz="1080" b="1" spc="-80" kern="0" dirty="0">
                 <a:solidFill>
                   <a:srgbClr val="1A2438"/>
                 </a:solidFill>
@@ -2451,7 +2451,7 @@
               </a:rPr>
               <a:t>8월</a:t>
             </a:r>
-            <a:endParaRPr lang="en-US" sz="1060" dirty="0"/>
+            <a:endParaRPr lang="en-US" sz="1080" dirty="0"/>
           </a:p>
         </p:txBody>
       </p:sp>
@@ -2463,8 +2463,8 @@
         </p:nvSpPr>
         <p:spPr>
           <a:xfrm>
-            <a:off x="1696852" y="3422599"/>
-            <a:ext cx="1826788" cy="357073"/>
+            <a:off x="1708922" y="3197017"/>
+            <a:ext cx="1813438" cy="364114"/>
           </a:xfrm>
           <a:prstGeom prst="rect">
             <a:avLst/>
@@ -2488,8 +2488,8 @@
         </p:nvSpPr>
         <p:spPr>
           <a:xfrm>
-            <a:off x="1804568" y="3422599"/>
-            <a:ext cx="1611264" cy="357073"/>
+            <a:off x="1818833" y="3197017"/>
+            <a:ext cx="1593616" cy="364114"/>
           </a:xfrm>
           <a:prstGeom prst="rect">
             <a:avLst/>
@@ -2508,7 +2508,7 @@
               <a:buNone/>
             </a:pPr>
             <a:r>
-              <a:rPr lang="en-US" sz="1060" b="1" spc="-80" kern="0" dirty="0">
+              <a:rPr lang="en-US" sz="1080" b="1" spc="-80" kern="0" dirty="0">
                 <a:solidFill>
                   <a:srgbClr val="1A2438"/>
                 </a:solidFill>
@@ -2518,7 +2518,7 @@
               </a:rPr>
               <a:t>3억 2,400만 원</a:t>
             </a:r>
-            <a:endParaRPr lang="en-US" sz="1060" dirty="0"/>
+            <a:endParaRPr lang="en-US" sz="1080" dirty="0"/>
           </a:p>
         </p:txBody>
       </p:sp>
@@ -2530,12 +2530,12 @@
         </p:nvSpPr>
         <p:spPr>
           <a:xfrm>
-            <a:off x="3691799" y="3065617"/>
-            <a:ext cx="2104583" cy="714055"/>
+            <a:off x="3707892" y="2832903"/>
+            <a:ext cx="2089313" cy="728228"/>
           </a:xfrm>
           <a:prstGeom prst="roundRect">
             <a:avLst>
-              <a:gd name="adj" fmla="val 13344"/>
+              <a:gd name="adj" fmla="val 13084"/>
             </a:avLst>
           </a:prstGeom>
           <a:solidFill>
@@ -2552,8 +2552,8 @@
         </p:nvSpPr>
         <p:spPr>
           <a:xfrm>
-            <a:off x="3691799" y="3199028"/>
-            <a:ext cx="2104583" cy="185898"/>
+            <a:off x="3707892" y="2989905"/>
+            <a:ext cx="2089313" cy="206106"/>
           </a:xfrm>
           <a:prstGeom prst="rect">
             <a:avLst/>
@@ -2572,7 +2572,7 @@
               <a:buNone/>
             </a:pPr>
             <a:r>
-              <a:rPr lang="en-US" sz="980" spc="-80" kern="0" dirty="0">
+              <a:rPr lang="en-US" sz="1080" spc="-80" kern="0" dirty="0">
                 <a:solidFill>
                   <a:srgbClr val="1A2438"/>
                 </a:solidFill>
@@ -2582,7 +2582,7 @@
               </a:rPr>
               <a:t>전월대비</a:t>
             </a:r>
-            <a:endParaRPr lang="en-US" sz="980" dirty="0"/>
+            <a:endParaRPr lang="en-US" sz="1080" dirty="0"/>
           </a:p>
         </p:txBody>
       </p:sp>
@@ -2594,8 +2594,8 @@
         </p:nvSpPr>
         <p:spPr>
           <a:xfrm>
-            <a:off x="3691799" y="3384926"/>
-            <a:ext cx="2104583" cy="261336"/>
+            <a:off x="3707892" y="3196011"/>
+            <a:ext cx="2089313" cy="208209"/>
           </a:xfrm>
           <a:prstGeom prst="rect">
             <a:avLst/>
@@ -2614,7 +2614,7 @@
               <a:buNone/>
             </a:pPr>
             <a:r>
-              <a:rPr lang="en-US" sz="1790" b="1" spc="-80" kern="0" dirty="0">
+              <a:rPr lang="en-US" sz="1430" b="1" spc="-80" kern="0" dirty="0">
                 <a:solidFill>
                   <a:srgbClr val="1A2438"/>
                 </a:solidFill>
@@ -2624,7 +2624,7 @@
               </a:rPr>
               <a:t>18% 증가</a:t>
             </a:r>
-            <a:endParaRPr lang="en-US" sz="1790" dirty="0"/>
+            <a:endParaRPr lang="en-US" sz="1430" dirty="0"/>
           </a:p>
         </p:txBody>
       </p:sp>
@@ -2636,12 +2636,12 @@
         </p:nvSpPr>
         <p:spPr>
           <a:xfrm>
-            <a:off x="6199449" y="2495580"/>
-            <a:ext cx="5611490" cy="294254"/>
+            <a:off x="6178418" y="2095530"/>
+            <a:ext cx="5632521" cy="435437"/>
           </a:xfrm>
           <a:prstGeom prst="roundRect">
             <a:avLst>
-              <a:gd name="adj" fmla="val 49907"/>
+              <a:gd name="adj" fmla="val 49895"/>
             </a:avLst>
           </a:prstGeom>
           <a:solidFill>
@@ -2658,8 +2658,8 @@
         </p:nvSpPr>
         <p:spPr>
           <a:xfrm>
-            <a:off x="6199449" y="2495580"/>
-            <a:ext cx="5611490" cy="294254"/>
+            <a:off x="6178418" y="2095530"/>
+            <a:ext cx="5632521" cy="435437"/>
           </a:xfrm>
           <a:prstGeom prst="rect">
             <a:avLst/>
@@ -2678,7 +2678,7 @@
               <a:buNone/>
             </a:pPr>
             <a:r>
-              <a:rPr lang="en-US" sz="1190" b="1" spc="-80" kern="0" dirty="0">
+              <a:rPr lang="en-US" sz="1760" b="1" spc="-80" kern="0" dirty="0">
                 <a:solidFill>
                   <a:srgbClr val="FFFFFF"/>
                 </a:solidFill>
@@ -2688,7 +2688,7 @@
               </a:rPr>
               <a:t>신규 고객</a:t>
             </a:r>
-            <a:endParaRPr lang="en-US" sz="1190" dirty="0"/>
+            <a:endParaRPr lang="en-US" sz="1760" dirty="0"/>
           </a:p>
         </p:txBody>
       </p:sp>
@@ -2700,12 +2700,12 @@
         </p:nvSpPr>
         <p:spPr>
           <a:xfrm>
-            <a:off x="6199449" y="2831805"/>
-            <a:ext cx="5611490" cy="1188629"/>
+            <a:off x="6178418" y="2577236"/>
+            <a:ext cx="5632521" cy="1247242"/>
           </a:xfrm>
           <a:prstGeom prst="roundRect">
             <a:avLst>
-              <a:gd name="adj" fmla="val 17632"/>
+              <a:gd name="adj" fmla="val 14509"/>
             </a:avLst>
           </a:prstGeom>
           <a:solidFill>
@@ -2729,8 +2729,8 @@
         </p:nvSpPr>
         <p:spPr>
           <a:xfrm>
-            <a:off x="6395679" y="3065617"/>
-            <a:ext cx="1119683" cy="357073"/>
+            <a:off x="6394856" y="2832903"/>
+            <a:ext cx="1111453" cy="364114"/>
           </a:xfrm>
           <a:prstGeom prst="rect">
             <a:avLst/>
@@ -2754,8 +2754,8 @@
         </p:nvSpPr>
         <p:spPr>
           <a:xfrm>
-            <a:off x="6503396" y="3065617"/>
-            <a:ext cx="904067" cy="357073"/>
+            <a:off x="6504767" y="2832903"/>
+            <a:ext cx="891631" cy="364114"/>
           </a:xfrm>
           <a:prstGeom prst="rect">
             <a:avLst/>
@@ -2774,7 +2774,7 @@
               <a:buNone/>
             </a:pPr>
             <a:r>
-              <a:rPr lang="en-US" sz="1060" b="1" spc="-80" kern="0" dirty="0">
+              <a:rPr lang="en-US" sz="1080" b="1" spc="-80" kern="0" dirty="0">
                 <a:solidFill>
                   <a:srgbClr val="1A2438"/>
                 </a:solidFill>
@@ -2784,7 +2784,7 @@
               </a:rPr>
               <a:t>7월</a:t>
             </a:r>
-            <a:endParaRPr lang="en-US" sz="1060" dirty="0"/>
+            <a:endParaRPr lang="en-US" sz="1080" dirty="0"/>
           </a:p>
         </p:txBody>
       </p:sp>
@@ -2796,8 +2796,8 @@
         </p:nvSpPr>
         <p:spPr>
           <a:xfrm>
-            <a:off x="7515271" y="3065617"/>
-            <a:ext cx="1826788" cy="357073"/>
+            <a:off x="7506310" y="2832903"/>
+            <a:ext cx="1813438" cy="364114"/>
           </a:xfrm>
           <a:prstGeom prst="rect">
             <a:avLst/>
@@ -2821,8 +2821,8 @@
         </p:nvSpPr>
         <p:spPr>
           <a:xfrm>
-            <a:off x="7623078" y="3065617"/>
-            <a:ext cx="1611264" cy="357073"/>
+            <a:off x="7616312" y="2832903"/>
+            <a:ext cx="1593616" cy="364114"/>
           </a:xfrm>
           <a:prstGeom prst="rect">
             <a:avLst/>
@@ -2841,7 +2841,7 @@
               <a:buNone/>
             </a:pPr>
             <a:r>
-              <a:rPr lang="en-US" sz="1060" spc="-80" kern="0" dirty="0">
+              <a:rPr lang="en-US" sz="1080" spc="-80" kern="0" dirty="0">
                 <a:solidFill>
                   <a:srgbClr val="1A2438"/>
                 </a:solidFill>
@@ -2851,7 +2851,7 @@
               </a:rPr>
               <a:t>4,342명</a:t>
             </a:r>
-            <a:endParaRPr lang="en-US" sz="1060" dirty="0"/>
+            <a:endParaRPr lang="en-US" sz="1080" dirty="0"/>
           </a:p>
         </p:txBody>
       </p:sp>
@@ -2863,8 +2863,8 @@
         </p:nvSpPr>
         <p:spPr>
           <a:xfrm>
-            <a:off x="6395679" y="3422599"/>
-            <a:ext cx="1119683" cy="357073"/>
+            <a:off x="6394856" y="3197017"/>
+            <a:ext cx="1111453" cy="364114"/>
           </a:xfrm>
           <a:prstGeom prst="rect">
             <a:avLst/>
@@ -2888,8 +2888,8 @@
         </p:nvSpPr>
         <p:spPr>
           <a:xfrm>
-            <a:off x="6503396" y="3422599"/>
-            <a:ext cx="904067" cy="357073"/>
+            <a:off x="6504767" y="3197017"/>
+            <a:ext cx="891631" cy="364114"/>
           </a:xfrm>
           <a:prstGeom prst="rect">
             <a:avLst/>
@@ -2908,7 +2908,7 @@
               <a:buNone/>
             </a:pPr>
             <a:r>
-              <a:rPr lang="en-US" sz="1060" b="1" spc="-80" kern="0" dirty="0">
+              <a:rPr lang="en-US" sz="1080" b="1" spc="-80" kern="0" dirty="0">
                 <a:solidFill>
                   <a:srgbClr val="1A2438"/>
                 </a:solidFill>
@@ -2918,7 +2918,7 @@
               </a:rPr>
               <a:t>8월</a:t>
             </a:r>
-            <a:endParaRPr lang="en-US" sz="1060" dirty="0"/>
+            <a:endParaRPr lang="en-US" sz="1080" dirty="0"/>
           </a:p>
         </p:txBody>
       </p:sp>
@@ -2930,8 +2930,8 @@
         </p:nvSpPr>
         <p:spPr>
           <a:xfrm>
-            <a:off x="7515271" y="3422599"/>
-            <a:ext cx="1826788" cy="357073"/>
+            <a:off x="7506310" y="3197017"/>
+            <a:ext cx="1813438" cy="364114"/>
           </a:xfrm>
           <a:prstGeom prst="rect">
             <a:avLst/>
@@ -2955,8 +2955,8 @@
         </p:nvSpPr>
         <p:spPr>
           <a:xfrm>
-            <a:off x="7623078" y="3422599"/>
-            <a:ext cx="1611264" cy="357073"/>
+            <a:off x="7616312" y="3197017"/>
+            <a:ext cx="1593616" cy="364114"/>
           </a:xfrm>
           <a:prstGeom prst="rect">
             <a:avLst/>
@@ -2975,7 +2975,7 @@
               <a:buNone/>
             </a:pPr>
             <a:r>
-              <a:rPr lang="en-US" sz="1060" b="1" spc="-80" kern="0" dirty="0">
+              <a:rPr lang="en-US" sz="1080" b="1" spc="-80" kern="0" dirty="0">
                 <a:solidFill>
                   <a:srgbClr val="1A2438"/>
                 </a:solidFill>
@@ -2985,7 +2985,7 @@
               </a:rPr>
               <a:t>4,820명</a:t>
             </a:r>
-            <a:endParaRPr lang="en-US" sz="1060" dirty="0"/>
+            <a:endParaRPr lang="en-US" sz="1080" dirty="0"/>
           </a:p>
         </p:txBody>
       </p:sp>
@@ -2997,12 +2997,12 @@
         </p:nvSpPr>
         <p:spPr>
           <a:xfrm>
-            <a:off x="9510217" y="3065617"/>
-            <a:ext cx="2104583" cy="714055"/>
+            <a:off x="9505279" y="2832903"/>
+            <a:ext cx="2089313" cy="728228"/>
           </a:xfrm>
           <a:prstGeom prst="roundRect">
             <a:avLst>
-              <a:gd name="adj" fmla="val 13344"/>
+              <a:gd name="adj" fmla="val 13084"/>
             </a:avLst>
           </a:prstGeom>
           <a:solidFill>
@@ -3019,8 +3019,8 @@
         </p:nvSpPr>
         <p:spPr>
           <a:xfrm>
-            <a:off x="9510217" y="3199028"/>
-            <a:ext cx="2104583" cy="185898"/>
+            <a:off x="9505279" y="2989905"/>
+            <a:ext cx="2089313" cy="206106"/>
           </a:xfrm>
           <a:prstGeom prst="rect">
             <a:avLst/>
@@ -3039,7 +3039,7 @@
               <a:buNone/>
             </a:pPr>
             <a:r>
-              <a:rPr lang="en-US" sz="980" spc="-80" kern="0" dirty="0">
+              <a:rPr lang="en-US" sz="1080" spc="-80" kern="0" dirty="0">
                 <a:solidFill>
                   <a:srgbClr val="1A2438"/>
                 </a:solidFill>
@@ -3049,7 +3049,7 @@
               </a:rPr>
               <a:t>전월대비</a:t>
             </a:r>
-            <a:endParaRPr lang="en-US" sz="980" dirty="0"/>
+            <a:endParaRPr lang="en-US" sz="1080" dirty="0"/>
           </a:p>
         </p:txBody>
       </p:sp>
@@ -3061,8 +3061,8 @@
         </p:nvSpPr>
         <p:spPr>
           <a:xfrm>
-            <a:off x="9510217" y="3384926"/>
-            <a:ext cx="2104583" cy="261336"/>
+            <a:off x="9505279" y="3196011"/>
+            <a:ext cx="2089313" cy="208209"/>
           </a:xfrm>
           <a:prstGeom prst="rect">
             <a:avLst/>
@@ -3081,7 +3081,7 @@
               <a:buNone/>
             </a:pPr>
             <a:r>
-              <a:rPr lang="en-US" sz="1790" b="1" spc="-80" kern="0" dirty="0">
+              <a:rPr lang="en-US" sz="1430" b="1" spc="-80" kern="0" dirty="0">
                 <a:solidFill>
                   <a:srgbClr val="1A2438"/>
                 </a:solidFill>
@@ -3091,7 +3091,7 @@
               </a:rPr>
               <a:t>11% 증가</a:t>
             </a:r>
-            <a:endParaRPr lang="en-US" sz="1790" dirty="0"/>
+            <a:endParaRPr lang="en-US" sz="1430" dirty="0"/>
           </a:p>
         </p:txBody>
       </p:sp>
@@ -3103,12 +3103,12 @@
         </p:nvSpPr>
         <p:spPr>
           <a:xfrm>
-            <a:off x="381030" y="4227363"/>
-            <a:ext cx="5611490" cy="294254"/>
+            <a:off x="381030" y="3989344"/>
+            <a:ext cx="5632521" cy="435437"/>
           </a:xfrm>
           <a:prstGeom prst="roundRect">
             <a:avLst>
-              <a:gd name="adj" fmla="val 49907"/>
+              <a:gd name="adj" fmla="val 49895"/>
             </a:avLst>
           </a:prstGeom>
           <a:solidFill>
@@ -3125,8 +3125,8 @@
         </p:nvSpPr>
         <p:spPr>
           <a:xfrm>
-            <a:off x="381030" y="4227363"/>
-            <a:ext cx="5611490" cy="294254"/>
+            <a:off x="381030" y="3989344"/>
+            <a:ext cx="5632521" cy="435437"/>
           </a:xfrm>
           <a:prstGeom prst="rect">
             <a:avLst/>
@@ -3145,7 +3145,7 @@
               <a:buNone/>
             </a:pPr>
             <a:r>
-              <a:rPr lang="en-US" sz="1190" b="1" spc="-80" kern="0" dirty="0">
+              <a:rPr lang="en-US" sz="1760" b="1" spc="-80" kern="0" dirty="0">
                 <a:solidFill>
                   <a:srgbClr val="FFFFFF"/>
                 </a:solidFill>
@@ -3155,7 +3155,7 @@
               </a:rPr>
               <a:t>도달</a:t>
             </a:r>
-            <a:endParaRPr lang="en-US" sz="1190" dirty="0"/>
+            <a:endParaRPr lang="en-US" sz="1760" dirty="0"/>
           </a:p>
         </p:txBody>
       </p:sp>
@@ -3167,12 +3167,12 @@
         </p:nvSpPr>
         <p:spPr>
           <a:xfrm>
-            <a:off x="381030" y="4563679"/>
-            <a:ext cx="5611490" cy="1188629"/>
+            <a:off x="381030" y="4471142"/>
+            <a:ext cx="5632521" cy="1247242"/>
           </a:xfrm>
           <a:prstGeom prst="roundRect">
             <a:avLst>
-              <a:gd name="adj" fmla="val 17632"/>
+              <a:gd name="adj" fmla="val 14509"/>
             </a:avLst>
           </a:prstGeom>
           <a:solidFill>
@@ -3196,8 +3196,8 @@
         </p:nvSpPr>
         <p:spPr>
           <a:xfrm>
-            <a:off x="577169" y="4797491"/>
-            <a:ext cx="1119683" cy="357073"/>
+            <a:off x="597378" y="4726808"/>
+            <a:ext cx="1111453" cy="364114"/>
           </a:xfrm>
           <a:prstGeom prst="rect">
             <a:avLst/>
@@ -3221,8 +3221,8 @@
         </p:nvSpPr>
         <p:spPr>
           <a:xfrm>
-            <a:off x="684977" y="4797491"/>
-            <a:ext cx="904067" cy="357073"/>
+            <a:off x="707380" y="4726808"/>
+            <a:ext cx="891631" cy="364114"/>
           </a:xfrm>
           <a:prstGeom prst="rect">
             <a:avLst/>
@@ -3241,7 +3241,7 @@
               <a:buNone/>
             </a:pPr>
             <a:r>
-              <a:rPr lang="en-US" sz="1060" b="1" spc="-80" kern="0" dirty="0">
+              <a:rPr lang="en-US" sz="1080" b="1" spc="-80" kern="0" dirty="0">
                 <a:solidFill>
                   <a:srgbClr val="1A2438"/>
                 </a:solidFill>
@@ -3251,7 +3251,7 @@
               </a:rPr>
               <a:t>7월</a:t>
             </a:r>
-            <a:endParaRPr lang="en-US" sz="1060" dirty="0"/>
+            <a:endParaRPr lang="en-US" sz="1080" dirty="0"/>
           </a:p>
         </p:txBody>
       </p:sp>
@@ -3263,8 +3263,8 @@
         </p:nvSpPr>
         <p:spPr>
           <a:xfrm>
-            <a:off x="1696852" y="4797491"/>
-            <a:ext cx="1826788" cy="357073"/>
+            <a:off x="1708922" y="4726808"/>
+            <a:ext cx="1813438" cy="364114"/>
           </a:xfrm>
           <a:prstGeom prst="rect">
             <a:avLst/>
@@ -3288,8 +3288,8 @@
         </p:nvSpPr>
         <p:spPr>
           <a:xfrm>
-            <a:off x="1804568" y="4797491"/>
-            <a:ext cx="1611264" cy="357073"/>
+            <a:off x="1818833" y="4726808"/>
+            <a:ext cx="1593616" cy="364114"/>
           </a:xfrm>
           <a:prstGeom prst="rect">
             <a:avLst/>
@@ -3308,7 +3308,7 @@
               <a:buNone/>
             </a:pPr>
             <a:r>
-              <a:rPr lang="en-US" sz="1060" spc="-80" kern="0" dirty="0">
+              <a:rPr lang="en-US" sz="1080" spc="-80" kern="0" dirty="0">
                 <a:solidFill>
                   <a:srgbClr val="1A2438"/>
                 </a:solidFill>
@@ -3318,7 +3318,7 @@
               </a:rPr>
               <a:t>172만 명</a:t>
             </a:r>
-            <a:endParaRPr lang="en-US" sz="1060" dirty="0"/>
+            <a:endParaRPr lang="en-US" sz="1080" dirty="0"/>
           </a:p>
         </p:txBody>
       </p:sp>
@@ -3330,8 +3330,8 @@
         </p:nvSpPr>
         <p:spPr>
           <a:xfrm>
-            <a:off x="577169" y="5154473"/>
-            <a:ext cx="1119683" cy="357073"/>
+            <a:off x="597378" y="5090922"/>
+            <a:ext cx="1111453" cy="364114"/>
           </a:xfrm>
           <a:prstGeom prst="rect">
             <a:avLst/>
@@ -3355,8 +3355,8 @@
         </p:nvSpPr>
         <p:spPr>
           <a:xfrm>
-            <a:off x="684977" y="5154473"/>
-            <a:ext cx="904067" cy="357073"/>
+            <a:off x="707380" y="5090922"/>
+            <a:ext cx="891631" cy="364114"/>
           </a:xfrm>
           <a:prstGeom prst="rect">
             <a:avLst/>
@@ -3375,7 +3375,7 @@
               <a:buNone/>
             </a:pPr>
             <a:r>
-              <a:rPr lang="en-US" sz="1060" b="1" spc="-80" kern="0" dirty="0">
+              <a:rPr lang="en-US" sz="1080" b="1" spc="-80" kern="0" dirty="0">
                 <a:solidFill>
                   <a:srgbClr val="1A2438"/>
                 </a:solidFill>
@@ -3385,7 +3385,7 @@
               </a:rPr>
               <a:t>8월</a:t>
             </a:r>
-            <a:endParaRPr lang="en-US" sz="1060" dirty="0"/>
+            <a:endParaRPr lang="en-US" sz="1080" dirty="0"/>
           </a:p>
         </p:txBody>
       </p:sp>
@@ -3397,8 +3397,8 @@
         </p:nvSpPr>
         <p:spPr>
           <a:xfrm>
-            <a:off x="1696852" y="5154473"/>
-            <a:ext cx="1826788" cy="357073"/>
+            <a:off x="1708922" y="5090922"/>
+            <a:ext cx="1813438" cy="364114"/>
           </a:xfrm>
           <a:prstGeom prst="rect">
             <a:avLst/>
@@ -3422,8 +3422,8 @@
         </p:nvSpPr>
         <p:spPr>
           <a:xfrm>
-            <a:off x="1804568" y="5154473"/>
-            <a:ext cx="1611264" cy="357073"/>
+            <a:off x="1818833" y="5090922"/>
+            <a:ext cx="1593616" cy="364114"/>
           </a:xfrm>
           <a:prstGeom prst="rect">
             <a:avLst/>
@@ -3442,7 +3442,7 @@
               <a:buNone/>
             </a:pPr>
             <a:r>
-              <a:rPr lang="en-US" sz="1060" b="1" spc="-80" kern="0" dirty="0">
+              <a:rPr lang="en-US" sz="1080" b="1" spc="-80" kern="0" dirty="0">
                 <a:solidFill>
                   <a:srgbClr val="1A2438"/>
                 </a:solidFill>
@@ -3452,7 +3452,7 @@
               </a:rPr>
               <a:t>187만 명</a:t>
             </a:r>
-            <a:endParaRPr lang="en-US" sz="1060" dirty="0"/>
+            <a:endParaRPr lang="en-US" sz="1080" dirty="0"/>
           </a:p>
         </p:txBody>
       </p:sp>
@@ -3464,12 +3464,12 @@
         </p:nvSpPr>
         <p:spPr>
           <a:xfrm>
-            <a:off x="3691799" y="4797491"/>
-            <a:ext cx="2104583" cy="714055"/>
+            <a:off x="3707892" y="4726808"/>
+            <a:ext cx="2089313" cy="728228"/>
           </a:xfrm>
           <a:prstGeom prst="roundRect">
             <a:avLst>
-              <a:gd name="adj" fmla="val 13344"/>
+              <a:gd name="adj" fmla="val 13084"/>
             </a:avLst>
           </a:prstGeom>
           <a:solidFill>
@@ -3486,8 +3486,8 @@
         </p:nvSpPr>
         <p:spPr>
           <a:xfrm>
-            <a:off x="3691799" y="4930902"/>
-            <a:ext cx="2104583" cy="185898"/>
+            <a:off x="3707892" y="4883719"/>
+            <a:ext cx="2089313" cy="206106"/>
           </a:xfrm>
           <a:prstGeom prst="rect">
             <a:avLst/>
@@ -3506,7 +3506,7 @@
               <a:buNone/>
             </a:pPr>
             <a:r>
-              <a:rPr lang="en-US" sz="980" spc="-80" kern="0" dirty="0">
+              <a:rPr lang="en-US" sz="1080" spc="-80" kern="0" dirty="0">
                 <a:solidFill>
                   <a:srgbClr val="1A2438"/>
                 </a:solidFill>
@@ -3516,7 +3516,7 @@
               </a:rPr>
               <a:t>전월대비</a:t>
             </a:r>
-            <a:endParaRPr lang="en-US" sz="980" dirty="0"/>
+            <a:endParaRPr lang="en-US" sz="1080" dirty="0"/>
           </a:p>
         </p:txBody>
       </p:sp>
@@ -3528,8 +3528,8 @@
         </p:nvSpPr>
         <p:spPr>
           <a:xfrm>
-            <a:off x="3691799" y="5116800"/>
-            <a:ext cx="2104583" cy="261336"/>
+            <a:off x="3707892" y="5089825"/>
+            <a:ext cx="2089313" cy="208209"/>
           </a:xfrm>
           <a:prstGeom prst="rect">
             <a:avLst/>
@@ -3548,7 +3548,7 @@
               <a:buNone/>
             </a:pPr>
             <a:r>
-              <a:rPr lang="en-US" sz="1790" b="1" spc="-80" kern="0" dirty="0">
+              <a:rPr lang="en-US" sz="1430" b="1" spc="-80" kern="0" dirty="0">
                 <a:solidFill>
                   <a:srgbClr val="1A2438"/>
                 </a:solidFill>
@@ -3558,7 +3558,7 @@
               </a:rPr>
               <a:t>9% 증가</a:t>
             </a:r>
-            <a:endParaRPr lang="en-US" sz="1790" dirty="0"/>
+            <a:endParaRPr lang="en-US" sz="1430" dirty="0"/>
           </a:p>
         </p:txBody>
       </p:sp>
@@ -3570,12 +3570,12 @@
         </p:nvSpPr>
         <p:spPr>
           <a:xfrm>
-            <a:off x="6199449" y="4227363"/>
-            <a:ext cx="5611490" cy="294254"/>
+            <a:off x="6178418" y="3989344"/>
+            <a:ext cx="5632521" cy="435437"/>
           </a:xfrm>
           <a:prstGeom prst="roundRect">
             <a:avLst>
-              <a:gd name="adj" fmla="val 49907"/>
+              <a:gd name="adj" fmla="val 49895"/>
             </a:avLst>
           </a:prstGeom>
           <a:solidFill>
@@ -3592,8 +3592,8 @@
         </p:nvSpPr>
         <p:spPr>
           <a:xfrm>
-            <a:off x="6199449" y="4227363"/>
-            <a:ext cx="5611490" cy="294254"/>
+            <a:off x="6178418" y="3989344"/>
+            <a:ext cx="5632521" cy="435437"/>
           </a:xfrm>
           <a:prstGeom prst="rect">
             <a:avLst/>
@@ -3612,7 +3612,7 @@
               <a:buNone/>
             </a:pPr>
             <a:r>
-              <a:rPr lang="en-US" sz="1190" b="1" spc="-80" kern="0" dirty="0">
+              <a:rPr lang="en-US" sz="1760" b="1" spc="-80" kern="0" dirty="0">
                 <a:solidFill>
                   <a:srgbClr val="FFFFFF"/>
                 </a:solidFill>
@@ -3622,7 +3622,7 @@
               </a:rPr>
               <a:t>ROAS</a:t>
             </a:r>
-            <a:endParaRPr lang="en-US" sz="1190" dirty="0"/>
+            <a:endParaRPr lang="en-US" sz="1760" dirty="0"/>
           </a:p>
         </p:txBody>
       </p:sp>
@@ -3634,12 +3634,12 @@
         </p:nvSpPr>
         <p:spPr>
           <a:xfrm>
-            <a:off x="6199449" y="4563679"/>
-            <a:ext cx="5611490" cy="1188629"/>
+            <a:off x="6178418" y="4471142"/>
+            <a:ext cx="5632521" cy="1247242"/>
           </a:xfrm>
           <a:prstGeom prst="roundRect">
             <a:avLst>
-              <a:gd name="adj" fmla="val 17632"/>
+              <a:gd name="adj" fmla="val 14509"/>
             </a:avLst>
           </a:prstGeom>
           <a:solidFill>
@@ -3663,8 +3663,8 @@
         </p:nvSpPr>
         <p:spPr>
           <a:xfrm>
-            <a:off x="6395679" y="4797491"/>
-            <a:ext cx="1119683" cy="357073"/>
+            <a:off x="6394856" y="4726808"/>
+            <a:ext cx="1111453" cy="364114"/>
           </a:xfrm>
           <a:prstGeom prst="rect">
             <a:avLst/>
@@ -3688,8 +3688,8 @@
         </p:nvSpPr>
         <p:spPr>
           <a:xfrm>
-            <a:off x="6503396" y="4797491"/>
-            <a:ext cx="904067" cy="357073"/>
+            <a:off x="6504767" y="4726808"/>
+            <a:ext cx="891631" cy="364114"/>
           </a:xfrm>
           <a:prstGeom prst="rect">
             <a:avLst/>
@@ -3708,7 +3708,7 @@
               <a:buNone/>
             </a:pPr>
             <a:r>
-              <a:rPr lang="en-US" sz="1060" b="1" spc="-80" kern="0" dirty="0">
+              <a:rPr lang="en-US" sz="1080" b="1" spc="-80" kern="0" dirty="0">
                 <a:solidFill>
                   <a:srgbClr val="1A2438"/>
                 </a:solidFill>
@@ -3718,7 +3718,7 @@
               </a:rPr>
               <a:t>목표</a:t>
             </a:r>
-            <a:endParaRPr lang="en-US" sz="1060" dirty="0"/>
+            <a:endParaRPr lang="en-US" sz="1080" dirty="0"/>
           </a:p>
         </p:txBody>
       </p:sp>
@@ -3730,8 +3730,8 @@
         </p:nvSpPr>
         <p:spPr>
           <a:xfrm>
-            <a:off x="7515271" y="4797491"/>
-            <a:ext cx="1826788" cy="357073"/>
+            <a:off x="7506310" y="4726808"/>
+            <a:ext cx="1813438" cy="364114"/>
           </a:xfrm>
           <a:prstGeom prst="rect">
             <a:avLst/>
@@ -3755,8 +3755,8 @@
         </p:nvSpPr>
         <p:spPr>
           <a:xfrm>
-            <a:off x="7623078" y="4797491"/>
-            <a:ext cx="1611264" cy="357073"/>
+            <a:off x="7616312" y="4726808"/>
+            <a:ext cx="1593616" cy="364114"/>
           </a:xfrm>
           <a:prstGeom prst="rect">
             <a:avLst/>
@@ -3775,7 +3775,7 @@
               <a:buNone/>
             </a:pPr>
             <a:r>
-              <a:rPr lang="en-US" sz="1060" spc="-80" kern="0" dirty="0">
+              <a:rPr lang="en-US" sz="1080" spc="-80" kern="0" dirty="0">
                 <a:solidFill>
                   <a:srgbClr val="1A2438"/>
                 </a:solidFill>
@@ -3785,7 +3785,7 @@
               </a:rPr>
               <a:t>380%</a:t>
             </a:r>
-            <a:endParaRPr lang="en-US" sz="1060" dirty="0"/>
+            <a:endParaRPr lang="en-US" sz="1080" dirty="0"/>
           </a:p>
         </p:txBody>
       </p:sp>
@@ -3797,8 +3797,8 @@
         </p:nvSpPr>
         <p:spPr>
           <a:xfrm>
-            <a:off x="6395679" y="5154473"/>
-            <a:ext cx="1119683" cy="357073"/>
+            <a:off x="6394856" y="5090922"/>
+            <a:ext cx="1111453" cy="364114"/>
           </a:xfrm>
           <a:prstGeom prst="rect">
             <a:avLst/>
@@ -3822,8 +3822,8 @@
         </p:nvSpPr>
         <p:spPr>
           <a:xfrm>
-            <a:off x="6503396" y="5154473"/>
-            <a:ext cx="904067" cy="357073"/>
+            <a:off x="6504767" y="5090922"/>
+            <a:ext cx="891631" cy="364114"/>
           </a:xfrm>
           <a:prstGeom prst="rect">
             <a:avLst/>
@@ -3842,7 +3842,7 @@
               <a:buNone/>
             </a:pPr>
             <a:r>
-              <a:rPr lang="en-US" sz="1060" b="1" spc="-80" kern="0" dirty="0">
+              <a:rPr lang="en-US" sz="1080" b="1" spc="-80" kern="0" dirty="0">
                 <a:solidFill>
                   <a:srgbClr val="1A2438"/>
                 </a:solidFill>
@@ -3852,7 +3852,7 @@
               </a:rPr>
               <a:t>8월</a:t>
             </a:r>
-            <a:endParaRPr lang="en-US" sz="1060" dirty="0"/>
+            <a:endParaRPr lang="en-US" sz="1080" dirty="0"/>
           </a:p>
         </p:txBody>
       </p:sp>
@@ -3864,8 +3864,8 @@
         </p:nvSpPr>
         <p:spPr>
           <a:xfrm>
-            <a:off x="7515271" y="5154473"/>
-            <a:ext cx="1826788" cy="357073"/>
+            <a:off x="7506310" y="5090922"/>
+            <a:ext cx="1813438" cy="364114"/>
           </a:xfrm>
           <a:prstGeom prst="rect">
             <a:avLst/>
@@ -3889,8 +3889,8 @@
         </p:nvSpPr>
         <p:spPr>
           <a:xfrm>
-            <a:off x="7623078" y="5154473"/>
-            <a:ext cx="1611264" cy="357073"/>
+            <a:off x="7616312" y="5090922"/>
+            <a:ext cx="1593616" cy="364114"/>
           </a:xfrm>
           <a:prstGeom prst="rect">
             <a:avLst/>
@@ -3909,7 +3909,7 @@
               <a:buNone/>
             </a:pPr>
             <a:r>
-              <a:rPr lang="en-US" sz="1060" b="1" spc="-80" kern="0" dirty="0">
+              <a:rPr lang="en-US" sz="1080" b="1" spc="-80" kern="0" dirty="0">
                 <a:solidFill>
                   <a:srgbClr val="1A2438"/>
                 </a:solidFill>
@@ -3919,7 +3919,7 @@
               </a:rPr>
               <a:t>412%</a:t>
             </a:r>
-            <a:endParaRPr lang="en-US" sz="1060" dirty="0"/>
+            <a:endParaRPr lang="en-US" sz="1080" dirty="0"/>
           </a:p>
         </p:txBody>
       </p:sp>
@@ -3931,12 +3931,12 @@
         </p:nvSpPr>
         <p:spPr>
           <a:xfrm>
-            <a:off x="9510217" y="4797491"/>
-            <a:ext cx="2104583" cy="714055"/>
+            <a:off x="9505279" y="4726808"/>
+            <a:ext cx="2089313" cy="728228"/>
           </a:xfrm>
           <a:prstGeom prst="roundRect">
             <a:avLst>
-              <a:gd name="adj" fmla="val 13344"/>
+              <a:gd name="adj" fmla="val 13084"/>
             </a:avLst>
           </a:prstGeom>
           <a:solidFill>
@@ -3953,8 +3953,8 @@
         </p:nvSpPr>
         <p:spPr>
           <a:xfrm>
-            <a:off x="9510217" y="4930902"/>
-            <a:ext cx="2104583" cy="185898"/>
+            <a:off x="9505279" y="4883719"/>
+            <a:ext cx="2089313" cy="206106"/>
           </a:xfrm>
           <a:prstGeom prst="rect">
             <a:avLst/>
@@ -3973,7 +3973,7 @@
               <a:buNone/>
             </a:pPr>
             <a:r>
-              <a:rPr lang="en-US" sz="980" spc="-80" kern="0" dirty="0">
+              <a:rPr lang="en-US" sz="1080" spc="-80" kern="0" dirty="0">
                 <a:solidFill>
                   <a:srgbClr val="1A2438"/>
                 </a:solidFill>
@@ -3983,7 +3983,7 @@
               </a:rPr>
               <a:t>목표대비</a:t>
             </a:r>
-            <a:endParaRPr lang="en-US" sz="980" dirty="0"/>
+            <a:endParaRPr lang="en-US" sz="1080" dirty="0"/>
           </a:p>
         </p:txBody>
       </p:sp>
@@ -3995,8 +3995,8 @@
         </p:nvSpPr>
         <p:spPr>
           <a:xfrm>
-            <a:off x="9510217" y="5116800"/>
-            <a:ext cx="2104583" cy="261336"/>
+            <a:off x="9505279" y="5089825"/>
+            <a:ext cx="2089313" cy="208209"/>
           </a:xfrm>
           <a:prstGeom prst="rect">
             <a:avLst/>
@@ -4015,7 +4015,7 @@
               <a:buNone/>
             </a:pPr>
             <a:r>
-              <a:rPr lang="en-US" sz="1790" b="1" spc="-80" kern="0" dirty="0">
+              <a:rPr lang="en-US" sz="1430" b="1" spc="-80" kern="0" dirty="0">
                 <a:solidFill>
                   <a:srgbClr val="1A2438"/>
                 </a:solidFill>
@@ -4025,7 +4025,7 @@
               </a:rPr>
               <a:t>8% 초과</a:t>
             </a:r>
-            <a:endParaRPr lang="en-US" sz="1790" dirty="0"/>
+            <a:endParaRPr lang="en-US" sz="1430" dirty="0"/>
           </a:p>
         </p:txBody>
       </p:sp>
@@ -4037,12 +4037,12 @@
         </p:nvSpPr>
         <p:spPr>
           <a:xfrm>
-            <a:off x="381030" y="5881695"/>
-            <a:ext cx="11430000" cy="557235"/>
+            <a:off x="381030" y="5821436"/>
+            <a:ext cx="11430000" cy="617494"/>
           </a:xfrm>
           <a:prstGeom prst="roundRect">
             <a:avLst>
-              <a:gd name="adj" fmla="val 23925"/>
+              <a:gd name="adj" fmla="val 21590"/>
             </a:avLst>
           </a:prstGeom>
           <a:solidFill>
@@ -4066,8 +4066,8 @@
         </p:nvSpPr>
         <p:spPr>
           <a:xfrm>
-            <a:off x="579364" y="5974598"/>
-            <a:ext cx="478963" cy="371338"/>
+            <a:off x="600852" y="5924489"/>
+            <a:ext cx="530901" cy="411389"/>
           </a:xfrm>
           <a:prstGeom prst="rect">
             <a:avLst/>
@@ -4086,7 +4086,7 @@
               <a:buNone/>
             </a:pPr>
             <a:r>
-              <a:rPr lang="en-US" sz="1020" b="1" spc="-80" kern="0" dirty="0">
+              <a:rPr lang="en-US" sz="1140" b="1" spc="-80" kern="0" dirty="0">
                 <a:solidFill>
                   <a:srgbClr val="AAC1E4"/>
                 </a:solidFill>
@@ -4096,7 +4096,7 @@
               </a:rPr>
               <a:t>특이사항</a:t>
             </a:r>
-            <a:endParaRPr lang="en-US" sz="1020" dirty="0"/>
+            <a:endParaRPr lang="en-US" sz="1140" dirty="0"/>
           </a:p>
         </p:txBody>
       </p:sp>
@@ -4108,8 +4108,8 @@
         </p:nvSpPr>
         <p:spPr>
           <a:xfrm>
-            <a:off x="1256568" y="5974598"/>
-            <a:ext cx="10356037" cy="371338"/>
+            <a:off x="1351666" y="5924489"/>
+            <a:ext cx="10239543" cy="411389"/>
           </a:xfrm>
           <a:prstGeom prst="rect">
             <a:avLst/>
@@ -4121,18 +4121,18 @@
           <a:bodyPr wrap="square" lIns="0" tIns="0" rIns="0" bIns="0" rtlCol="0" anchor="ctr"/>
           <a:lstStyle/>
           <a:p>
-            <a:pPr algn="l" marL="152400" indent="-152400">
+            <a:pPr algn="l" marL="165100" indent="-165100">
               <a:lnSpc>
                 <a:spcPct val="125000"/>
               </a:lnSpc>
               <a:spcAft>
-                <a:spcPts val="386"/>
+                <a:spcPts val="426"/>
               </a:spcAft>
               <a:buSzPct val="100000"/>
               <a:buChar char="•"/>
             </a:pPr>
             <a:r>
-              <a:rPr lang="en-US" sz="980" spc="-80" kern="0" dirty="0">
+              <a:rPr lang="en-US" sz="1080" spc="-80" kern="0" dirty="0">
                 <a:solidFill>
                   <a:srgbClr val="8297BC"/>
                 </a:solidFill>
@@ -4142,10 +4142,10 @@
               </a:rPr>
               <a:t>성수기 막바지 프로모션과 신제품 미니 제습기 출시 효과가 맞물리며 주요 지표가 모두 목표치 초과 달성</a:t>
             </a:r>
-            <a:endParaRPr lang="en-US" sz="980" dirty="0"/>
-          </a:p>
-          <a:p>
-            <a:pPr algn="l" marL="152400" indent="-152400">
+            <a:endParaRPr lang="en-US" sz="1080" dirty="0"/>
+          </a:p>
+          <a:p>
+            <a:pPr algn="l" marL="165100" indent="-165100">
               <a:lnSpc>
                 <a:spcPct val="125000"/>
               </a:lnSpc>
@@ -4153,7 +4153,7 @@
               <a:buChar char="•"/>
             </a:pPr>
             <a:r>
-              <a:rPr lang="en-US" sz="980" spc="-80" kern="0" dirty="0">
+              <a:rPr lang="en-US" sz="1080" spc="-80" kern="0" dirty="0">
                 <a:solidFill>
                   <a:srgbClr val="8297BC"/>
                 </a:solidFill>
@@ -4163,7 +4163,7 @@
               </a:rPr>
               <a:t>특정 채널에 편중되지 않고 유튜브, 인스타그램, 블로그 세 채널이 고르게 성장</a:t>
             </a:r>
-            <a:endParaRPr lang="en-US" sz="980" dirty="0"/>
+            <a:endParaRPr lang="en-US" sz="1080" dirty="0"/>
           </a:p>
         </p:txBody>
       </p:sp>
@@ -4266,7 +4266,7 @@
               <a:buNone/>
             </a:pPr>
             <a:r>
-              <a:rPr lang="en-US" sz="1050" spc="-80" kern="0" dirty="0">
+              <a:rPr lang="en-US" sz="980" spc="-80" kern="0" dirty="0">
                 <a:solidFill>
                   <a:srgbClr val="8B95A7"/>
                 </a:solidFill>
@@ -4276,7 +4276,7 @@
               </a:rPr>
               <a:t>3</a:t>
             </a:r>
-            <a:endParaRPr lang="en-US" sz="1050" dirty="0"/>
+            <a:endParaRPr lang="en-US" sz="980" dirty="0"/>
           </a:p>
         </p:txBody>
       </p:sp>
@@ -4289,7 +4289,7 @@
         <p:spPr>
           <a:xfrm>
             <a:off x="381030" y="581010"/>
-            <a:ext cx="10477470" cy="400050"/>
+            <a:ext cx="10477470" cy="485821"/>
           </a:xfrm>
           <a:prstGeom prst="rect">
             <a:avLst/>
@@ -4305,7 +4305,7 @@
               <a:buNone/>
             </a:pPr>
             <a:r>
-              <a:rPr lang="en-US" sz="2600" spc="-80" kern="0" dirty="0">
+              <a:rPr lang="en-US" sz="3150" spc="-80" kern="0" dirty="0">
                 <a:solidFill>
                   <a:srgbClr val="10141C"/>
                 </a:solidFill>
@@ -4319,7 +4319,7 @@
               <a:buNone/>
             </a:pPr>
             <a:r>
-              <a:rPr lang="en-US" sz="2600" spc="-80" kern="0" dirty="0">
+              <a:rPr lang="en-US" sz="3150" spc="-80" kern="0" dirty="0">
                 <a:solidFill>
                   <a:srgbClr val="10141C"/>
                 </a:solidFill>
@@ -4333,7 +4333,7 @@
               <a:buNone/>
             </a:pPr>
             <a:r>
-              <a:rPr lang="en-US" sz="2600" spc="-80" kern="0" dirty="0">
+              <a:rPr lang="en-US" sz="3150" spc="-80" kern="0" dirty="0">
                 <a:solidFill>
                   <a:srgbClr val="10141C"/>
                 </a:solidFill>
@@ -4347,7 +4347,7 @@
               <a:buNone/>
             </a:pPr>
             <a:r>
-              <a:rPr lang="en-US" sz="2600" spc="-80" kern="0" dirty="0">
+              <a:rPr lang="en-US" sz="3150" spc="-80" kern="0" dirty="0">
                 <a:solidFill>
                   <a:srgbClr val="10141C"/>
                 </a:solidFill>
@@ -4357,7 +4357,7 @@
               </a:rPr>
               <a:t>전월 대비 35% 성장</a:t>
             </a:r>
-            <a:endParaRPr lang="en-US" sz="2600" dirty="0"/>
+            <a:endParaRPr lang="en-US" sz="3150" dirty="0"/>
           </a:p>
         </p:txBody>
       </p:sp>
@@ -4431,12 +4431,12 @@
         </p:nvSpPr>
         <p:spPr>
           <a:xfrm>
-            <a:off x="381030" y="2495580"/>
-            <a:ext cx="5603992" cy="315742"/>
+            <a:off x="381030" y="2095530"/>
+            <a:ext cx="5627492" cy="462046"/>
           </a:xfrm>
           <a:prstGeom prst="roundRect">
             <a:avLst>
-              <a:gd name="adj" fmla="val 49899"/>
+              <a:gd name="adj" fmla="val 49891"/>
             </a:avLst>
           </a:prstGeom>
           <a:solidFill>
@@ -4453,8 +4453,8 @@
         </p:nvSpPr>
         <p:spPr>
           <a:xfrm>
-            <a:off x="381030" y="2495580"/>
-            <a:ext cx="5603992" cy="315742"/>
+            <a:off x="381030" y="2095530"/>
+            <a:ext cx="5627492" cy="462046"/>
           </a:xfrm>
           <a:prstGeom prst="rect">
             <a:avLst/>
@@ -4473,7 +4473,7 @@
               <a:buNone/>
             </a:pPr>
             <a:r>
-              <a:rPr lang="en-US" sz="1280" b="1" spc="-80" kern="0" dirty="0">
+              <a:rPr lang="en-US" sz="1870" b="1" spc="-80" kern="0" dirty="0">
                 <a:solidFill>
                   <a:srgbClr val="FFFFFF"/>
                 </a:solidFill>
@@ -4483,7 +4483,7 @@
               </a:rPr>
               <a:t>도달</a:t>
             </a:r>
-            <a:endParaRPr lang="en-US" sz="1280" dirty="0"/>
+            <a:endParaRPr lang="en-US" sz="1870" dirty="0"/>
           </a:p>
         </p:txBody>
       </p:sp>
@@ -4495,12 +4495,12 @@
         </p:nvSpPr>
         <p:spPr>
           <a:xfrm>
-            <a:off x="381030" y="2856403"/>
-            <a:ext cx="5603992" cy="2845613"/>
+            <a:off x="381030" y="2606772"/>
+            <a:ext cx="5627492" cy="3067538"/>
           </a:xfrm>
           <a:prstGeom prst="roundRect">
             <a:avLst>
-              <a:gd name="adj" fmla="val 7365"/>
+              <a:gd name="adj" fmla="val 5899"/>
             </a:avLst>
           </a:prstGeom>
           <a:solidFill>
@@ -4524,8 +4524,8 @@
         </p:nvSpPr>
         <p:spPr>
           <a:xfrm>
-            <a:off x="591525" y="2999323"/>
-            <a:ext cx="5182911" cy="199522"/>
+            <a:off x="610636" y="2762585"/>
+            <a:ext cx="5168189" cy="218724"/>
           </a:xfrm>
           <a:prstGeom prst="rect">
             <a:avLst/>
@@ -4544,7 +4544,7 @@
               <a:buNone/>
             </a:pPr>
             <a:r>
-              <a:rPr lang="en-US" sz="1050" spc="-80" kern="0" dirty="0">
+              <a:rPr lang="en-US" sz="1150" spc="-80" kern="0" dirty="0">
                 <a:solidFill>
                   <a:srgbClr val="4A5568"/>
                 </a:solidFill>
@@ -4554,7 +4554,7 @@
               </a:rPr>
               <a:t>조회수</a:t>
             </a:r>
-            <a:endParaRPr lang="en-US" sz="1050" dirty="0"/>
+            <a:endParaRPr lang="en-US" sz="1150" dirty="0"/>
           </a:p>
         </p:txBody>
       </p:sp>
@@ -4566,8 +4566,8 @@
         </p:nvSpPr>
         <p:spPr>
           <a:xfrm>
-            <a:off x="591525" y="3198846"/>
-            <a:ext cx="5182911" cy="432603"/>
+            <a:off x="610636" y="2981310"/>
+            <a:ext cx="5168189" cy="340888"/>
           </a:xfrm>
           <a:prstGeom prst="rect">
             <a:avLst/>
@@ -4583,7 +4583,7 @@
               <a:buNone/>
             </a:pPr>
             <a:r>
-              <a:rPr lang="en-US" sz="3100" b="1" spc="-100" kern="0" dirty="0">
+              <a:rPr lang="en-US" sz="2440" b="1" spc="-100" kern="0" dirty="0">
                 <a:solidFill>
                   <a:srgbClr val="1A2438"/>
                 </a:solidFill>
@@ -4597,7 +4597,7 @@
               <a:buNone/>
             </a:pPr>
             <a:r>
-              <a:rPr lang="en-US" sz="1550" b="1" dirty="0">
+              <a:rPr lang="en-US" sz="1220" b="1" dirty="0">
                 <a:solidFill>
                   <a:srgbClr val="1A2438"/>
                 </a:solidFill>
@@ -4607,7 +4607,7 @@
               </a:rPr>
               <a:t>만 회</a:t>
             </a:r>
-            <a:endParaRPr lang="en-US" sz="3100" dirty="0"/>
+            <a:endParaRPr lang="en-US" sz="2440" dirty="0"/>
           </a:p>
         </p:txBody>
       </p:sp>
@@ -4619,8 +4619,8 @@
         </p:nvSpPr>
         <p:spPr>
           <a:xfrm>
-            <a:off x="591525" y="3699114"/>
-            <a:ext cx="5182911" cy="186263"/>
+            <a:off x="610636" y="3395990"/>
+            <a:ext cx="5168189" cy="204186"/>
           </a:xfrm>
           <a:prstGeom prst="rect">
             <a:avLst/>
@@ -4639,7 +4639,7 @@
               <a:buNone/>
             </a:pPr>
             <a:r>
-              <a:rPr lang="en-US" sz="1050" b="1" spc="-80" kern="0" dirty="0">
+              <a:rPr lang="en-US" sz="1150" b="1" spc="-80" kern="0" dirty="0">
                 <a:solidFill>
                   <a:srgbClr val="1E5BB8"/>
                 </a:solidFill>
@@ -4649,7 +4649,7 @@
               </a:rPr>
               <a:t>전월 31만 회 · 전월 대비 35% 성장</a:t>
             </a:r>
-            <a:endParaRPr lang="en-US" sz="1050" dirty="0"/>
+            <a:endParaRPr lang="en-US" sz="1150" dirty="0"/>
           </a:p>
         </p:txBody>
       </p:sp>
@@ -4661,12 +4661,12 @@
         </p:nvSpPr>
         <p:spPr>
           <a:xfrm>
-            <a:off x="591525" y="4020708"/>
-            <a:ext cx="5182911" cy="1530980"/>
+            <a:off x="610636" y="3747760"/>
+            <a:ext cx="5168189" cy="1762415"/>
           </a:xfrm>
           <a:prstGeom prst="roundRect">
             <a:avLst>
-              <a:gd name="adj" fmla="val 6223"/>
+              <a:gd name="adj" fmla="val 5406"/>
             </a:avLst>
           </a:prstGeom>
           <a:solidFill>
@@ -4683,8 +4683,8 @@
         </p:nvSpPr>
         <p:spPr>
           <a:xfrm>
-            <a:off x="771936" y="4171036"/>
-            <a:ext cx="3109783" cy="225582"/>
+            <a:off x="807507" y="3911803"/>
+            <a:ext cx="3100913" cy="246065"/>
           </a:xfrm>
           <a:prstGeom prst="rect">
             <a:avLst/>
@@ -4703,7 +4703,7 @@
               <a:buNone/>
             </a:pPr>
             <a:r>
-              <a:rPr lang="en-US" sz="1180" b="1" spc="-80" kern="0" dirty="0">
+              <a:rPr lang="en-US" sz="1290" b="1" spc="-80" kern="0" dirty="0">
                 <a:solidFill>
                   <a:srgbClr val="1A2438"/>
                 </a:solidFill>
@@ -4713,7 +4713,7 @@
               </a:rPr>
               <a:t>월별 조회수 추이</a:t>
             </a:r>
-            <a:endParaRPr lang="en-US" sz="1180" dirty="0"/>
+            <a:endParaRPr lang="en-US" sz="1290" dirty="0"/>
           </a:p>
         </p:txBody>
       </p:sp>
@@ -4725,8 +4725,8 @@
         </p:nvSpPr>
         <p:spPr>
           <a:xfrm>
-            <a:off x="3182935" y="4171036"/>
-            <a:ext cx="2410998" cy="225582"/>
+            <a:off x="3194731" y="3911803"/>
+            <a:ext cx="2387224" cy="246065"/>
           </a:xfrm>
           <a:prstGeom prst="rect">
             <a:avLst/>
@@ -4745,7 +4745,7 @@
               <a:buNone/>
             </a:pPr>
             <a:r>
-              <a:rPr lang="en-US" sz="1050" spc="-80" kern="0" dirty="0">
+              <a:rPr lang="en-US" sz="1150" spc="-80" kern="0" dirty="0">
                 <a:solidFill>
                   <a:srgbClr val="4A5568"/>
                 </a:solidFill>
@@ -4755,7 +4755,7 @@
               </a:rPr>
               <a:t>단위 : 만 회</a:t>
             </a:r>
-            <a:endParaRPr lang="en-US" sz="1050" dirty="0"/>
+            <a:endParaRPr lang="en-US" sz="1150" dirty="0"/>
           </a:p>
         </p:txBody>
       </p:sp>
@@ -4766,8 +4766,8 @@
           <p:nvPr/>
         </p:nvGraphicFramePr>
         <p:xfrm>
-          <a:off x="663672" y="4396618"/>
-          <a:ext cx="5038527" cy="1064819"/>
+          <a:off x="689366" y="4157868"/>
+          <a:ext cx="5010729" cy="1253917"/>
         </p:xfrm>
         <a:graphic xmlns:a="http://schemas.openxmlformats.org/drawingml/2006/main">
           <a:graphicData uri="http://schemas.openxmlformats.org/drawingml/2006/chart">
@@ -4783,12 +4783,12 @@
         </p:nvSpPr>
         <p:spPr>
           <a:xfrm>
-            <a:off x="6207039" y="2495580"/>
-            <a:ext cx="5603992" cy="315742"/>
+            <a:off x="6183447" y="2095530"/>
+            <a:ext cx="5627492" cy="462046"/>
           </a:xfrm>
           <a:prstGeom prst="roundRect">
             <a:avLst>
-              <a:gd name="adj" fmla="val 49899"/>
+              <a:gd name="adj" fmla="val 49891"/>
             </a:avLst>
           </a:prstGeom>
           <a:solidFill>
@@ -4805,8 +4805,8 @@
         </p:nvSpPr>
         <p:spPr>
           <a:xfrm>
-            <a:off x="6207039" y="2495580"/>
-            <a:ext cx="5603992" cy="315742"/>
+            <a:off x="6183447" y="2095530"/>
+            <a:ext cx="5627492" cy="462046"/>
           </a:xfrm>
           <a:prstGeom prst="rect">
             <a:avLst/>
@@ -4825,7 +4825,7 @@
               <a:buNone/>
             </a:pPr>
             <a:r>
-              <a:rPr lang="en-US" sz="1280" b="1" spc="-80" kern="0" dirty="0">
+              <a:rPr lang="en-US" sz="1870" b="1" spc="-80" kern="0" dirty="0">
                 <a:solidFill>
                   <a:srgbClr val="FFFFFF"/>
                 </a:solidFill>
@@ -4835,7 +4835,7 @@
               </a:rPr>
               <a:t>주요 성과</a:t>
             </a:r>
-            <a:endParaRPr lang="en-US" sz="1280" dirty="0"/>
+            <a:endParaRPr lang="en-US" sz="1870" dirty="0"/>
           </a:p>
         </p:txBody>
       </p:sp>
@@ -4847,12 +4847,12 @@
         </p:nvSpPr>
         <p:spPr>
           <a:xfrm>
-            <a:off x="6207039" y="2856403"/>
-            <a:ext cx="5603992" cy="2845613"/>
+            <a:off x="6183447" y="2606772"/>
+            <a:ext cx="5627492" cy="3067538"/>
           </a:xfrm>
           <a:prstGeom prst="roundRect">
             <a:avLst>
-              <a:gd name="adj" fmla="val 7365"/>
+              <a:gd name="adj" fmla="val 5899"/>
             </a:avLst>
           </a:prstGeom>
           <a:solidFill>
@@ -4876,8 +4876,8 @@
         </p:nvSpPr>
         <p:spPr>
           <a:xfrm>
-            <a:off x="6417534" y="3165470"/>
-            <a:ext cx="5182911" cy="195499"/>
+            <a:off x="6413144" y="2925897"/>
+            <a:ext cx="5168189" cy="213238"/>
           </a:xfrm>
           <a:prstGeom prst="rect">
             <a:avLst/>
@@ -4896,7 +4896,7 @@
               <a:buNone/>
             </a:pPr>
             <a:r>
-              <a:rPr lang="en-US" sz="1110" b="1" spc="-80" kern="0" dirty="0">
+              <a:rPr lang="en-US" sz="1210" b="1" spc="-80" kern="0" dirty="0">
                 <a:solidFill>
                   <a:srgbClr val="515B75"/>
                 </a:solidFill>
@@ -4906,7 +4906,7 @@
               </a:rPr>
               <a:t>채널 전체</a:t>
             </a:r>
-            <a:endParaRPr lang="en-US" sz="1110" dirty="0"/>
+            <a:endParaRPr lang="en-US" sz="1210" dirty="0"/>
           </a:p>
         </p:txBody>
       </p:sp>
@@ -4918,8 +4918,8 @@
         </p:nvSpPr>
         <p:spPr>
           <a:xfrm>
-            <a:off x="6417534" y="3428634"/>
-            <a:ext cx="5182911" cy="676656"/>
+            <a:off x="6413144" y="3213019"/>
+            <a:ext cx="5168189" cy="738195"/>
           </a:xfrm>
           <a:prstGeom prst="rect">
             <a:avLst/>
@@ -4931,18 +4931,18 @@
           <a:bodyPr wrap="square" lIns="0" tIns="0" rIns="0" bIns="0" rtlCol="0" anchor="t"/>
           <a:lstStyle/>
           <a:p>
-            <a:pPr algn="l" marL="152400" indent="-152400">
+            <a:pPr algn="l" marL="177800" indent="-177800">
               <a:lnSpc>
                 <a:spcPct val="125000"/>
               </a:lnSpc>
               <a:spcAft>
-                <a:spcPts val="2013"/>
+                <a:spcPts val="2196"/>
               </a:spcAft>
               <a:buSzPct val="100000"/>
               <a:buChar char="•"/>
             </a:pPr>
             <a:r>
-              <a:rPr lang="en-US" sz="1180" spc="-80" kern="0" dirty="0">
+              <a:rPr lang="en-US" sz="1290" spc="-80" kern="0" dirty="0">
                 <a:solidFill>
                   <a:srgbClr val="1A2438"/>
                 </a:solidFill>
@@ -4952,10 +4952,10 @@
               </a:rPr>
               <a:t>구독자 1,200명 증가해 2.8만 명 달성</a:t>
             </a:r>
-            <a:endParaRPr lang="en-US" sz="1180" dirty="0"/>
-          </a:p>
-          <a:p>
-            <a:pPr algn="l" marL="152400" indent="-152400">
+            <a:endParaRPr lang="en-US" sz="1290" dirty="0"/>
+          </a:p>
+          <a:p>
+            <a:pPr algn="l" marL="177800" indent="-177800">
               <a:lnSpc>
                 <a:spcPct val="125000"/>
               </a:lnSpc>
@@ -4963,7 +4963,7 @@
               <a:buChar char="•"/>
             </a:pPr>
             <a:r>
-              <a:rPr lang="en-US" sz="1180" spc="-80" kern="0" dirty="0">
+              <a:rPr lang="en-US" sz="1290" spc="-80" kern="0" dirty="0">
                 <a:solidFill>
                   <a:srgbClr val="1A2438"/>
                 </a:solidFill>
@@ -4973,7 +4973,7 @@
               </a:rPr>
               <a:t>제품 상세페이지 유입의 38%가 유튜브를 경유</a:t>
             </a:r>
-            <a:endParaRPr lang="en-US" sz="1180" dirty="0"/>
+            <a:endParaRPr lang="en-US" sz="1290" dirty="0"/>
           </a:p>
         </p:txBody>
       </p:sp>
@@ -4985,8 +4985,8 @@
         </p:nvSpPr>
         <p:spPr>
           <a:xfrm>
-            <a:off x="6417534" y="4105290"/>
-            <a:ext cx="5182911" cy="9510"/>
+            <a:off x="6413144" y="3951214"/>
+            <a:ext cx="5168189" cy="9510"/>
           </a:xfrm>
           <a:prstGeom prst="rect">
             <a:avLst/>
@@ -5005,8 +5005,8 @@
         </p:nvSpPr>
         <p:spPr>
           <a:xfrm>
-            <a:off x="6417534" y="4265219"/>
-            <a:ext cx="5182911" cy="195499"/>
+            <a:off x="6413144" y="4124767"/>
+            <a:ext cx="5168189" cy="213238"/>
           </a:xfrm>
           <a:prstGeom prst="rect">
             <a:avLst/>
@@ -5025,7 +5025,7 @@
               <a:buNone/>
             </a:pPr>
             <a:r>
-              <a:rPr lang="en-US" sz="1110" b="1" spc="-80" kern="0" dirty="0">
+              <a:rPr lang="en-US" sz="1210" b="1" spc="-80" kern="0" dirty="0">
                 <a:solidFill>
                   <a:srgbClr val="515B75"/>
                 </a:solidFill>
@@ -5035,7 +5035,7 @@
               </a:rPr>
               <a:t>콘텐츠</a:t>
             </a:r>
-            <a:endParaRPr lang="en-US" sz="1110" dirty="0"/>
+            <a:endParaRPr lang="en-US" sz="1210" dirty="0"/>
           </a:p>
         </p:txBody>
       </p:sp>
@@ -5047,8 +5047,8 @@
         </p:nvSpPr>
         <p:spPr>
           <a:xfrm>
-            <a:off x="6417534" y="4528383"/>
-            <a:ext cx="5182911" cy="1007486"/>
+            <a:off x="6413144" y="4411889"/>
+            <a:ext cx="5168189" cy="1099109"/>
           </a:xfrm>
           <a:prstGeom prst="rect">
             <a:avLst/>
@@ -5060,18 +5060,18 @@
           <a:bodyPr wrap="square" lIns="0" tIns="0" rIns="0" bIns="0" rtlCol="0" anchor="t"/>
           <a:lstStyle/>
           <a:p>
-            <a:pPr algn="l" marL="152400" indent="-152400">
+            <a:pPr algn="l" marL="177800" indent="-177800">
               <a:lnSpc>
                 <a:spcPct val="125000"/>
               </a:lnSpc>
               <a:spcAft>
-                <a:spcPts val="1539"/>
+                <a:spcPts val="1679"/>
               </a:spcAft>
               <a:buSzPct val="100000"/>
               <a:buChar char="•"/>
             </a:pPr>
             <a:r>
-              <a:rPr lang="en-US" sz="1180" b="1" spc="-80" kern="0" dirty="0">
+              <a:rPr lang="en-US" sz="1290" b="1" spc="-80" kern="0" dirty="0">
                 <a:solidFill>
                   <a:srgbClr val="1A2438"/>
                 </a:solidFill>
@@ -5081,21 +5081,21 @@
               </a:rPr>
               <a:t>신제품 미니 제습기 언박싱 영상 *8월 7일 게시</a:t>
             </a:r>
-            <a:endParaRPr lang="en-US" sz="1180" dirty="0"/>
-          </a:p>
-          <a:p>
-            <a:pPr algn="l" marL="152400" indent="-152400">
+            <a:endParaRPr lang="en-US" sz="1290" dirty="0"/>
+          </a:p>
+          <a:p>
+            <a:pPr algn="l" marL="177800" indent="-177800">
               <a:lnSpc>
                 <a:spcPct val="125000"/>
               </a:lnSpc>
               <a:spcAft>
-                <a:spcPts val="1539"/>
+                <a:spcPts val="1679"/>
               </a:spcAft>
               <a:buSzPct val="100000"/>
               <a:buChar char="•"/>
             </a:pPr>
             <a:r>
-              <a:rPr lang="en-US" sz="1180" spc="-80" kern="0" dirty="0">
+              <a:rPr lang="en-US" sz="1290" spc="-80" kern="0" dirty="0">
                 <a:solidFill>
                   <a:srgbClr val="1A2438"/>
                 </a:solidFill>
@@ -5105,10 +5105,10 @@
               </a:rPr>
               <a:t>조회수 12만 회로 채널 역대 2위 기록</a:t>
             </a:r>
-            <a:endParaRPr lang="en-US" sz="1180" dirty="0"/>
-          </a:p>
-          <a:p>
-            <a:pPr algn="l" marL="152400" indent="-152400">
+            <a:endParaRPr lang="en-US" sz="1290" dirty="0"/>
+          </a:p>
+          <a:p>
+            <a:pPr algn="l" marL="177800" indent="-177800">
               <a:lnSpc>
                 <a:spcPct val="125000"/>
               </a:lnSpc>
@@ -5116,7 +5116,7 @@
               <a:buChar char="•"/>
             </a:pPr>
             <a:r>
-              <a:rPr lang="en-US" sz="1180" spc="-80" kern="0" dirty="0">
+              <a:rPr lang="en-US" sz="1290" spc="-80" kern="0" dirty="0">
                 <a:solidFill>
                   <a:srgbClr val="1A2438"/>
                 </a:solidFill>
@@ -5126,7 +5126,7 @@
               </a:rPr>
               <a:t>좋아요 4,300개, 구매 전환 214건 달성</a:t>
             </a:r>
-            <a:endParaRPr lang="en-US" sz="1180" dirty="0"/>
+            <a:endParaRPr lang="en-US" sz="1290" dirty="0"/>
           </a:p>
         </p:txBody>
       </p:sp>
@@ -5138,12 +5138,12 @@
         </p:nvSpPr>
         <p:spPr>
           <a:xfrm>
-            <a:off x="381030" y="5840913"/>
-            <a:ext cx="11430000" cy="598018"/>
+            <a:off x="381030" y="5783671"/>
+            <a:ext cx="11430000" cy="655259"/>
           </a:xfrm>
           <a:prstGeom prst="roundRect">
             <a:avLst>
-              <a:gd name="adj" fmla="val 22294"/>
+              <a:gd name="adj" fmla="val 20346"/>
             </a:avLst>
           </a:prstGeom>
           <a:solidFill>
@@ -5167,8 +5167,8 @@
         </p:nvSpPr>
         <p:spPr>
           <a:xfrm>
-            <a:off x="593811" y="5940674"/>
-            <a:ext cx="513984" cy="398496"/>
+            <a:off x="614294" y="5893034"/>
+            <a:ext cx="563453" cy="436535"/>
           </a:xfrm>
           <a:prstGeom prst="rect">
             <a:avLst/>
@@ -5187,7 +5187,7 @@
               <a:buNone/>
             </a:pPr>
             <a:r>
-              <a:rPr lang="en-US" sz="1100" b="1" spc="-80" kern="0" dirty="0">
+              <a:rPr lang="en-US" sz="1210" b="1" spc="-80" kern="0" dirty="0">
                 <a:solidFill>
                   <a:srgbClr val="AAC1E4"/>
                 </a:solidFill>
@@ -5197,7 +5197,7 @@
               </a:rPr>
               <a:t>특이사항</a:t>
             </a:r>
-            <a:endParaRPr lang="en-US" sz="1100" dirty="0"/>
+            <a:endParaRPr lang="en-US" sz="1210" dirty="0"/>
           </a:p>
         </p:txBody>
       </p:sp>
@@ -5209,8 +5209,8 @@
         </p:nvSpPr>
         <p:spPr>
           <a:xfrm>
-            <a:off x="1320668" y="5940674"/>
-            <a:ext cx="10277490" cy="398496"/>
+            <a:off x="1411011" y="5893034"/>
+            <a:ext cx="10166665" cy="436535"/>
           </a:xfrm>
           <a:prstGeom prst="rect">
             <a:avLst/>
@@ -5222,18 +5222,18 @@
           <a:bodyPr wrap="square" lIns="0" tIns="0" rIns="0" bIns="0" rtlCol="0" anchor="ctr"/>
           <a:lstStyle/>
           <a:p>
-            <a:pPr algn="l" marL="152400" indent="-152400">
+            <a:pPr algn="l" marL="177800" indent="-177800">
               <a:lnSpc>
                 <a:spcPct val="125000"/>
               </a:lnSpc>
               <a:spcAft>
-                <a:spcPts val="414"/>
+                <a:spcPts val="452"/>
               </a:spcAft>
               <a:buSzPct val="100000"/>
               <a:buChar char="•"/>
             </a:pPr>
             <a:r>
-              <a:rPr lang="en-US" sz="1050" spc="-80" kern="0" dirty="0">
+              <a:rPr lang="en-US" sz="1150" spc="-80" kern="0" dirty="0">
                 <a:solidFill>
                   <a:srgbClr val="8297BC"/>
                 </a:solidFill>
@@ -5243,10 +5243,10 @@
               </a:rPr>
               <a:t>장마가 끝난 직후 습기 고민이 정점에 달하는 타이밍에 게시된 점과 실사용 비교 중심의 구성이 주효</a:t>
             </a:r>
-            <a:endParaRPr lang="en-US" sz="1050" dirty="0"/>
-          </a:p>
-          <a:p>
-            <a:pPr algn="l" marL="152400" indent="-152400">
+            <a:endParaRPr lang="en-US" sz="1150" dirty="0"/>
+          </a:p>
+          <a:p>
+            <a:pPr algn="l" marL="177800" indent="-177800">
               <a:lnSpc>
                 <a:spcPct val="125000"/>
               </a:lnSpc>
@@ -5254,7 +5254,7 @@
               <a:buChar char="•"/>
             </a:pPr>
             <a:r>
-              <a:rPr lang="en-US" sz="1050" spc="-80" kern="0" dirty="0">
+              <a:rPr lang="en-US" sz="1150" spc="-80" kern="0" dirty="0">
                 <a:solidFill>
                   <a:srgbClr val="8297BC"/>
                 </a:solidFill>
@@ -5264,7 +5264,7 @@
               </a:rPr>
               <a:t>유튜브가 구매 여정에서 차지하는 비중 확인</a:t>
             </a:r>
-            <a:endParaRPr lang="en-US" sz="1050" dirty="0"/>
+            <a:endParaRPr lang="en-US" sz="1150" dirty="0"/>
           </a:p>
         </p:txBody>
       </p:sp>
@@ -5367,7 +5367,7 @@
               <a:buNone/>
             </a:pPr>
             <a:r>
-              <a:rPr lang="en-US" sz="1050" spc="-80" kern="0" dirty="0">
+              <a:rPr lang="en-US" sz="980" spc="-80" kern="0" dirty="0">
                 <a:solidFill>
                   <a:srgbClr val="8B95A7"/>
                 </a:solidFill>
@@ -5377,7 +5377,7 @@
               </a:rPr>
               <a:t>4</a:t>
             </a:r>
-            <a:endParaRPr lang="en-US" sz="1050" dirty="0"/>
+            <a:endParaRPr lang="en-US" sz="980" dirty="0"/>
           </a:p>
         </p:txBody>
       </p:sp>
@@ -5390,7 +5390,7 @@
         <p:spPr>
           <a:xfrm>
             <a:off x="381030" y="581010"/>
-            <a:ext cx="10477470" cy="400050"/>
+            <a:ext cx="10477470" cy="485821"/>
           </a:xfrm>
           <a:prstGeom prst="rect">
             <a:avLst/>
@@ -5406,7 +5406,7 @@
               <a:buNone/>
             </a:pPr>
             <a:r>
-              <a:rPr lang="en-US" sz="2600" spc="-80" kern="0" dirty="0">
+              <a:rPr lang="en-US" sz="3150" spc="-80" kern="0" dirty="0">
                 <a:solidFill>
                   <a:srgbClr val="10141C"/>
                 </a:solidFill>
@@ -5420,7 +5420,7 @@
               <a:buNone/>
             </a:pPr>
             <a:r>
-              <a:rPr lang="en-US" sz="2600" spc="-80" kern="0" dirty="0">
+              <a:rPr lang="en-US" sz="3150" spc="-80" kern="0" dirty="0">
                 <a:solidFill>
                   <a:srgbClr val="10141C"/>
                 </a:solidFill>
@@ -5434,7 +5434,7 @@
               <a:buNone/>
             </a:pPr>
             <a:r>
-              <a:rPr lang="en-US" sz="2600" spc="-80" kern="0" dirty="0">
+              <a:rPr lang="en-US" sz="3150" spc="-80" kern="0" dirty="0">
                 <a:solidFill>
                   <a:srgbClr val="10141C"/>
                 </a:solidFill>
@@ -5448,7 +5448,7 @@
               <a:buNone/>
             </a:pPr>
             <a:r>
-              <a:rPr lang="en-US" sz="2600" spc="-80" kern="0" dirty="0">
+              <a:rPr lang="en-US" sz="3150" spc="-80" kern="0" dirty="0">
                 <a:solidFill>
                   <a:srgbClr val="10141C"/>
                 </a:solidFill>
@@ -5458,7 +5458,7 @@
               </a:rPr>
               <a:t>월 2,100명 순증</a:t>
             </a:r>
-            <a:endParaRPr lang="en-US" sz="2600" dirty="0"/>
+            <a:endParaRPr lang="en-US" sz="3150" dirty="0"/>
           </a:p>
         </p:txBody>
       </p:sp>
@@ -5532,12 +5532,12 @@
         </p:nvSpPr>
         <p:spPr>
           <a:xfrm>
-            <a:off x="381030" y="2495580"/>
-            <a:ext cx="5603992" cy="315742"/>
+            <a:off x="381030" y="2095530"/>
+            <a:ext cx="5627492" cy="462046"/>
           </a:xfrm>
           <a:prstGeom prst="roundRect">
             <a:avLst>
-              <a:gd name="adj" fmla="val 49899"/>
+              <a:gd name="adj" fmla="val 49891"/>
             </a:avLst>
           </a:prstGeom>
           <a:solidFill>
@@ -5554,8 +5554,8 @@
         </p:nvSpPr>
         <p:spPr>
           <a:xfrm>
-            <a:off x="381030" y="2495580"/>
-            <a:ext cx="5603992" cy="315742"/>
+            <a:off x="381030" y="2095530"/>
+            <a:ext cx="5627492" cy="462046"/>
           </a:xfrm>
           <a:prstGeom prst="rect">
             <a:avLst/>
@@ -5574,7 +5574,7 @@
               <a:buNone/>
             </a:pPr>
             <a:r>
-              <a:rPr lang="en-US" sz="1280" b="1" spc="-80" kern="0" dirty="0">
+              <a:rPr lang="en-US" sz="1870" b="1" spc="-80" kern="0" dirty="0">
                 <a:solidFill>
                   <a:srgbClr val="FFFFFF"/>
                 </a:solidFill>
@@ -5584,7 +5584,7 @@
               </a:rPr>
               <a:t>도달</a:t>
             </a:r>
-            <a:endParaRPr lang="en-US" sz="1280" dirty="0"/>
+            <a:endParaRPr lang="en-US" sz="1870" dirty="0"/>
           </a:p>
         </p:txBody>
       </p:sp>
@@ -5596,12 +5596,12 @@
         </p:nvSpPr>
         <p:spPr>
           <a:xfrm>
-            <a:off x="381030" y="2856403"/>
-            <a:ext cx="5603992" cy="2845613"/>
+            <a:off x="381030" y="2606772"/>
+            <a:ext cx="5627492" cy="3067538"/>
           </a:xfrm>
           <a:prstGeom prst="roundRect">
             <a:avLst>
-              <a:gd name="adj" fmla="val 7365"/>
+              <a:gd name="adj" fmla="val 5899"/>
             </a:avLst>
           </a:prstGeom>
           <a:solidFill>
@@ -5625,8 +5625,8 @@
         </p:nvSpPr>
         <p:spPr>
           <a:xfrm>
-            <a:off x="591525" y="2999323"/>
-            <a:ext cx="5182911" cy="199522"/>
+            <a:off x="610636" y="2762585"/>
+            <a:ext cx="5168189" cy="218724"/>
           </a:xfrm>
           <a:prstGeom prst="rect">
             <a:avLst/>
@@ -5645,7 +5645,7 @@
               <a:buNone/>
             </a:pPr>
             <a:r>
-              <a:rPr lang="en-US" sz="1050" spc="-80" kern="0" dirty="0">
+              <a:rPr lang="en-US" sz="1150" spc="-80" kern="0" dirty="0">
                 <a:solidFill>
                   <a:srgbClr val="4A5568"/>
                 </a:solidFill>
@@ -5655,7 +5655,7 @@
               </a:rPr>
               <a:t>도달 계정</a:t>
             </a:r>
-            <a:endParaRPr lang="en-US" sz="1050" dirty="0"/>
+            <a:endParaRPr lang="en-US" sz="1150" dirty="0"/>
           </a:p>
         </p:txBody>
       </p:sp>
@@ -5667,8 +5667,8 @@
         </p:nvSpPr>
         <p:spPr>
           <a:xfrm>
-            <a:off x="591525" y="3198846"/>
-            <a:ext cx="5182911" cy="432603"/>
+            <a:off x="610636" y="2981310"/>
+            <a:ext cx="5168189" cy="340888"/>
           </a:xfrm>
           <a:prstGeom prst="rect">
             <a:avLst/>
@@ -5684,7 +5684,7 @@
               <a:buNone/>
             </a:pPr>
             <a:r>
-              <a:rPr lang="en-US" sz="3100" b="1" spc="-100" kern="0" dirty="0">
+              <a:rPr lang="en-US" sz="2440" b="1" spc="-100" kern="0" dirty="0">
                 <a:solidFill>
                   <a:srgbClr val="1A2438"/>
                 </a:solidFill>
@@ -5698,7 +5698,7 @@
               <a:buNone/>
             </a:pPr>
             <a:r>
-              <a:rPr lang="en-US" sz="1550" b="1" dirty="0">
+              <a:rPr lang="en-US" sz="1220" b="1" dirty="0">
                 <a:solidFill>
                   <a:srgbClr val="1A2438"/>
                 </a:solidFill>
@@ -5708,7 +5708,7 @@
               </a:rPr>
               <a:t>만 명</a:t>
             </a:r>
-            <a:endParaRPr lang="en-US" sz="3100" dirty="0"/>
+            <a:endParaRPr lang="en-US" sz="2440" dirty="0"/>
           </a:p>
         </p:txBody>
       </p:sp>
@@ -5720,8 +5720,8 @@
         </p:nvSpPr>
         <p:spPr>
           <a:xfrm>
-            <a:off x="591525" y="3699114"/>
-            <a:ext cx="5182911" cy="186263"/>
+            <a:off x="610636" y="3395990"/>
+            <a:ext cx="5168189" cy="204186"/>
           </a:xfrm>
           <a:prstGeom prst="rect">
             <a:avLst/>
@@ -5740,7 +5740,7 @@
               <a:buNone/>
             </a:pPr>
             <a:r>
-              <a:rPr lang="en-US" sz="1050" b="1" spc="-80" kern="0" dirty="0">
+              <a:rPr lang="en-US" sz="1150" b="1" spc="-80" kern="0" dirty="0">
                 <a:solidFill>
                   <a:srgbClr val="1E5BB8"/>
                 </a:solidFill>
@@ -5750,7 +5750,7 @@
               </a:rPr>
               <a:t>전월 49만 명 · 전월 대비 18% 성장</a:t>
             </a:r>
-            <a:endParaRPr lang="en-US" sz="1050" dirty="0"/>
+            <a:endParaRPr lang="en-US" sz="1150" dirty="0"/>
           </a:p>
         </p:txBody>
       </p:sp>
@@ -5762,12 +5762,12 @@
         </p:nvSpPr>
         <p:spPr>
           <a:xfrm>
-            <a:off x="591525" y="4020708"/>
-            <a:ext cx="5182911" cy="1530980"/>
+            <a:off x="610636" y="3747760"/>
+            <a:ext cx="5168189" cy="1762415"/>
           </a:xfrm>
           <a:prstGeom prst="roundRect">
             <a:avLst>
-              <a:gd name="adj" fmla="val 6223"/>
+              <a:gd name="adj" fmla="val 5406"/>
             </a:avLst>
           </a:prstGeom>
           <a:solidFill>
@@ -5784,8 +5784,8 @@
         </p:nvSpPr>
         <p:spPr>
           <a:xfrm>
-            <a:off x="771936" y="4171036"/>
-            <a:ext cx="3109783" cy="225582"/>
+            <a:off x="807507" y="3911803"/>
+            <a:ext cx="3100913" cy="246065"/>
           </a:xfrm>
           <a:prstGeom prst="rect">
             <a:avLst/>
@@ -5804,7 +5804,7 @@
               <a:buNone/>
             </a:pPr>
             <a:r>
-              <a:rPr lang="en-US" sz="1180" b="1" spc="-80" kern="0" dirty="0">
+              <a:rPr lang="en-US" sz="1290" b="1" spc="-80" kern="0" dirty="0">
                 <a:solidFill>
                   <a:srgbClr val="1A2438"/>
                 </a:solidFill>
@@ -5814,7 +5814,7 @@
               </a:rPr>
               <a:t>월별 도달 추이</a:t>
             </a:r>
-            <a:endParaRPr lang="en-US" sz="1180" dirty="0"/>
+            <a:endParaRPr lang="en-US" sz="1290" dirty="0"/>
           </a:p>
         </p:txBody>
       </p:sp>
@@ -5826,8 +5826,8 @@
         </p:nvSpPr>
         <p:spPr>
           <a:xfrm>
-            <a:off x="3182935" y="4171036"/>
-            <a:ext cx="2410998" cy="225582"/>
+            <a:off x="3194731" y="3911803"/>
+            <a:ext cx="2387224" cy="246065"/>
           </a:xfrm>
           <a:prstGeom prst="rect">
             <a:avLst/>
@@ -5846,7 +5846,7 @@
               <a:buNone/>
             </a:pPr>
             <a:r>
-              <a:rPr lang="en-US" sz="1050" spc="-80" kern="0" dirty="0">
+              <a:rPr lang="en-US" sz="1150" spc="-80" kern="0" dirty="0">
                 <a:solidFill>
                   <a:srgbClr val="4A5568"/>
                 </a:solidFill>
@@ -5856,7 +5856,7 @@
               </a:rPr>
               <a:t>단위 : 만 명</a:t>
             </a:r>
-            <a:endParaRPr lang="en-US" sz="1050" dirty="0"/>
+            <a:endParaRPr lang="en-US" sz="1150" dirty="0"/>
           </a:p>
         </p:txBody>
       </p:sp>
@@ -5867,8 +5867,8 @@
           <p:nvPr/>
         </p:nvGraphicFramePr>
         <p:xfrm>
-          <a:off x="663672" y="4396618"/>
-          <a:ext cx="5038527" cy="1064819"/>
+          <a:off x="689366" y="4157868"/>
+          <a:ext cx="5010729" cy="1253917"/>
         </p:xfrm>
         <a:graphic xmlns:a="http://schemas.openxmlformats.org/drawingml/2006/main">
           <a:graphicData uri="http://schemas.openxmlformats.org/drawingml/2006/chart">
@@ -5884,12 +5884,12 @@
         </p:nvSpPr>
         <p:spPr>
           <a:xfrm>
-            <a:off x="6207039" y="2495580"/>
-            <a:ext cx="5603992" cy="315742"/>
+            <a:off x="6183447" y="2095530"/>
+            <a:ext cx="5627492" cy="462046"/>
           </a:xfrm>
           <a:prstGeom prst="roundRect">
             <a:avLst>
-              <a:gd name="adj" fmla="val 49899"/>
+              <a:gd name="adj" fmla="val 49891"/>
             </a:avLst>
           </a:prstGeom>
           <a:solidFill>
@@ -5906,8 +5906,8 @@
         </p:nvSpPr>
         <p:spPr>
           <a:xfrm>
-            <a:off x="6207039" y="2495580"/>
-            <a:ext cx="5603992" cy="315742"/>
+            <a:off x="6183447" y="2095530"/>
+            <a:ext cx="5627492" cy="462046"/>
           </a:xfrm>
           <a:prstGeom prst="rect">
             <a:avLst/>
@@ -5926,7 +5926,7 @@
               <a:buNone/>
             </a:pPr>
             <a:r>
-              <a:rPr lang="en-US" sz="1280" b="1" spc="-80" kern="0" dirty="0">
+              <a:rPr lang="en-US" sz="1870" b="1" spc="-80" kern="0" dirty="0">
                 <a:solidFill>
                   <a:srgbClr val="FFFFFF"/>
                 </a:solidFill>
@@ -5936,7 +5936,7 @@
               </a:rPr>
               <a:t>주요 성과</a:t>
             </a:r>
-            <a:endParaRPr lang="en-US" sz="1280" dirty="0"/>
+            <a:endParaRPr lang="en-US" sz="1870" dirty="0"/>
           </a:p>
         </p:txBody>
       </p:sp>
@@ -5948,12 +5948,12 @@
         </p:nvSpPr>
         <p:spPr>
           <a:xfrm>
-            <a:off x="6207039" y="2856403"/>
-            <a:ext cx="5603992" cy="2845613"/>
+            <a:off x="6183447" y="2606772"/>
+            <a:ext cx="5627492" cy="3067538"/>
           </a:xfrm>
           <a:prstGeom prst="roundRect">
             <a:avLst>
-              <a:gd name="adj" fmla="val 7365"/>
+              <a:gd name="adj" fmla="val 5899"/>
             </a:avLst>
           </a:prstGeom>
           <a:solidFill>
@@ -5977,8 +5977,8 @@
         </p:nvSpPr>
         <p:spPr>
           <a:xfrm>
-            <a:off x="6417534" y="3165470"/>
-            <a:ext cx="5182911" cy="195499"/>
+            <a:off x="6413144" y="2925897"/>
+            <a:ext cx="5168189" cy="213238"/>
           </a:xfrm>
           <a:prstGeom prst="rect">
             <a:avLst/>
@@ -5997,7 +5997,7 @@
               <a:buNone/>
             </a:pPr>
             <a:r>
-              <a:rPr lang="en-US" sz="1110" b="1" spc="-80" kern="0" dirty="0">
+              <a:rPr lang="en-US" sz="1210" b="1" spc="-80" kern="0" dirty="0">
                 <a:solidFill>
                   <a:srgbClr val="515B75"/>
                 </a:solidFill>
@@ -6007,7 +6007,7 @@
               </a:rPr>
               <a:t>채널 전체</a:t>
             </a:r>
-            <a:endParaRPr lang="en-US" sz="1110" dirty="0"/>
+            <a:endParaRPr lang="en-US" sz="1210" dirty="0"/>
           </a:p>
         </p:txBody>
       </p:sp>
@@ -6019,8 +6019,8 @@
         </p:nvSpPr>
         <p:spPr>
           <a:xfrm>
-            <a:off x="6417534" y="3428634"/>
-            <a:ext cx="5182911" cy="676656"/>
+            <a:off x="6413144" y="3213019"/>
+            <a:ext cx="5168189" cy="738195"/>
           </a:xfrm>
           <a:prstGeom prst="rect">
             <a:avLst/>
@@ -6032,18 +6032,18 @@
           <a:bodyPr wrap="square" lIns="0" tIns="0" rIns="0" bIns="0" rtlCol="0" anchor="t"/>
           <a:lstStyle/>
           <a:p>
-            <a:pPr algn="l" marL="152400" indent="-152400">
+            <a:pPr algn="l" marL="177800" indent="-177800">
               <a:lnSpc>
                 <a:spcPct val="125000"/>
               </a:lnSpc>
               <a:spcAft>
-                <a:spcPts val="2013"/>
+                <a:spcPts val="2196"/>
               </a:spcAft>
               <a:buSzPct val="100000"/>
               <a:buChar char="•"/>
             </a:pPr>
             <a:r>
-              <a:rPr lang="en-US" sz="1180" spc="-80" kern="0" dirty="0">
+              <a:rPr lang="en-US" sz="1290" spc="-80" kern="0" dirty="0">
                 <a:solidFill>
                   <a:srgbClr val="1A2438"/>
                 </a:solidFill>
@@ -6053,10 +6053,10 @@
               </a:rPr>
               <a:t>팔로워 2,100명 순증 · 누적 3.6만 명</a:t>
             </a:r>
-            <a:endParaRPr lang="en-US" sz="1180" dirty="0"/>
-          </a:p>
-          <a:p>
-            <a:pPr algn="l" marL="152400" indent="-152400">
+            <a:endParaRPr lang="en-US" sz="1290" dirty="0"/>
+          </a:p>
+          <a:p>
+            <a:pPr algn="l" marL="177800" indent="-177800">
               <a:lnSpc>
                 <a:spcPct val="125000"/>
               </a:lnSpc>
@@ -6064,7 +6064,7 @@
               <a:buChar char="•"/>
             </a:pPr>
             <a:r>
-              <a:rPr lang="en-US" sz="1180" spc="-80" kern="0" dirty="0">
+              <a:rPr lang="en-US" sz="1290" spc="-80" kern="0" dirty="0">
                 <a:solidFill>
                   <a:srgbClr val="1A2438"/>
                 </a:solidFill>
@@ -6074,7 +6074,7 @@
               </a:rPr>
               <a:t>프로필 → 스토어 클릭 5,800건</a:t>
             </a:r>
-            <a:endParaRPr lang="en-US" sz="1180" dirty="0"/>
+            <a:endParaRPr lang="en-US" sz="1290" dirty="0"/>
           </a:p>
         </p:txBody>
       </p:sp>
@@ -6086,8 +6086,8 @@
         </p:nvSpPr>
         <p:spPr>
           <a:xfrm>
-            <a:off x="6417534" y="4105290"/>
-            <a:ext cx="5182911" cy="9510"/>
+            <a:off x="6413144" y="3951214"/>
+            <a:ext cx="5168189" cy="9510"/>
           </a:xfrm>
           <a:prstGeom prst="rect">
             <a:avLst/>
@@ -6106,8 +6106,8 @@
         </p:nvSpPr>
         <p:spPr>
           <a:xfrm>
-            <a:off x="6417534" y="4265219"/>
-            <a:ext cx="5182911" cy="195499"/>
+            <a:off x="6413144" y="4124767"/>
+            <a:ext cx="5168189" cy="213238"/>
           </a:xfrm>
           <a:prstGeom prst="rect">
             <a:avLst/>
@@ -6126,7 +6126,7 @@
               <a:buNone/>
             </a:pPr>
             <a:r>
-              <a:rPr lang="en-US" sz="1110" b="1" spc="-80" kern="0" dirty="0">
+              <a:rPr lang="en-US" sz="1210" b="1" spc="-80" kern="0" dirty="0">
                 <a:solidFill>
                   <a:srgbClr val="515B75"/>
                 </a:solidFill>
@@ -6136,7 +6136,7 @@
               </a:rPr>
               <a:t>콘텐츠</a:t>
             </a:r>
-            <a:endParaRPr lang="en-US" sz="1110" dirty="0"/>
+            <a:endParaRPr lang="en-US" sz="1210" dirty="0"/>
           </a:p>
         </p:txBody>
       </p:sp>
@@ -6148,8 +6148,8 @@
         </p:nvSpPr>
         <p:spPr>
           <a:xfrm>
-            <a:off x="6417534" y="4528383"/>
-            <a:ext cx="5182911" cy="1007486"/>
+            <a:off x="6413144" y="4411889"/>
+            <a:ext cx="5168189" cy="1099109"/>
           </a:xfrm>
           <a:prstGeom prst="rect">
             <a:avLst/>
@@ -6161,18 +6161,18 @@
           <a:bodyPr wrap="square" lIns="0" tIns="0" rIns="0" bIns="0" rtlCol="0" anchor="t"/>
           <a:lstStyle/>
           <a:p>
-            <a:pPr algn="l" marL="152400" indent="-152400">
+            <a:pPr algn="l" marL="177800" indent="-177800">
               <a:lnSpc>
                 <a:spcPct val="125000"/>
               </a:lnSpc>
               <a:spcAft>
-                <a:spcPts val="1539"/>
+                <a:spcPts val="1679"/>
               </a:spcAft>
               <a:buSzPct val="100000"/>
               <a:buChar char="•"/>
             </a:pPr>
             <a:r>
-              <a:rPr lang="en-US" sz="1180" b="1" spc="-80" kern="0" dirty="0">
+              <a:rPr lang="en-US" sz="1290" b="1" spc="-80" kern="0" dirty="0">
                 <a:solidFill>
                   <a:srgbClr val="1A2438"/>
                 </a:solidFill>
@@ -6182,21 +6182,21 @@
               </a:rPr>
               <a:t>‘장마 끝, 곰팡이 전쟁’ 릴스 *8월 12일 게시</a:t>
             </a:r>
-            <a:endParaRPr lang="en-US" sz="1180" dirty="0"/>
-          </a:p>
-          <a:p>
-            <a:pPr algn="l" marL="152400" indent="-152400">
+            <a:endParaRPr lang="en-US" sz="1290" dirty="0"/>
+          </a:p>
+          <a:p>
+            <a:pPr algn="l" marL="177800" indent="-177800">
               <a:lnSpc>
                 <a:spcPct val="125000"/>
               </a:lnSpc>
               <a:spcAft>
-                <a:spcPts val="1539"/>
+                <a:spcPts val="1679"/>
               </a:spcAft>
               <a:buSzPct val="100000"/>
               <a:buChar char="•"/>
             </a:pPr>
             <a:r>
-              <a:rPr lang="en-US" sz="1180" spc="-80" kern="0" dirty="0">
+              <a:rPr lang="en-US" sz="1290" spc="-80" kern="0" dirty="0">
                 <a:solidFill>
                   <a:srgbClr val="1A2438"/>
                 </a:solidFill>
@@ -6206,10 +6206,10 @@
               </a:rPr>
               <a:t>조회수 31만 회 · 저장 4,900건</a:t>
             </a:r>
-            <a:endParaRPr lang="en-US" sz="1180" dirty="0"/>
-          </a:p>
-          <a:p>
-            <a:pPr algn="l" marL="152400" indent="-152400">
+            <a:endParaRPr lang="en-US" sz="1290" dirty="0"/>
+          </a:p>
+          <a:p>
+            <a:pPr algn="l" marL="177800" indent="-177800">
               <a:lnSpc>
                 <a:spcPct val="125000"/>
               </a:lnSpc>
@@ -6217,7 +6217,7 @@
               <a:buChar char="•"/>
             </a:pPr>
             <a:r>
-              <a:rPr lang="en-US" sz="1180" spc="-80" kern="0" dirty="0">
+              <a:rPr lang="en-US" sz="1290" spc="-80" kern="0" dirty="0">
                 <a:solidFill>
                   <a:srgbClr val="1A2438"/>
                 </a:solidFill>
@@ -6227,7 +6227,7 @@
               </a:rPr>
               <a:t>댓글 참여율 6.2%로 채널 최고</a:t>
             </a:r>
-            <a:endParaRPr lang="en-US" sz="1180" dirty="0"/>
+            <a:endParaRPr lang="en-US" sz="1290" dirty="0"/>
           </a:p>
         </p:txBody>
       </p:sp>
@@ -6239,12 +6239,12 @@
         </p:nvSpPr>
         <p:spPr>
           <a:xfrm>
-            <a:off x="381030" y="5840913"/>
-            <a:ext cx="11430000" cy="598018"/>
+            <a:off x="381030" y="5783671"/>
+            <a:ext cx="11430000" cy="655259"/>
           </a:xfrm>
           <a:prstGeom prst="roundRect">
             <a:avLst>
-              <a:gd name="adj" fmla="val 22294"/>
+              <a:gd name="adj" fmla="val 20346"/>
             </a:avLst>
           </a:prstGeom>
           <a:solidFill>
@@ -6268,8 +6268,8 @@
         </p:nvSpPr>
         <p:spPr>
           <a:xfrm>
-            <a:off x="593811" y="5940674"/>
-            <a:ext cx="513984" cy="398496"/>
+            <a:off x="614294" y="5893034"/>
+            <a:ext cx="563453" cy="436535"/>
           </a:xfrm>
           <a:prstGeom prst="rect">
             <a:avLst/>
@@ -6288,7 +6288,7 @@
               <a:buNone/>
             </a:pPr>
             <a:r>
-              <a:rPr lang="en-US" sz="1100" b="1" spc="-80" kern="0" dirty="0">
+              <a:rPr lang="en-US" sz="1210" b="1" spc="-80" kern="0" dirty="0">
                 <a:solidFill>
                   <a:srgbClr val="AAC1E4"/>
                 </a:solidFill>
@@ -6298,7 +6298,7 @@
               </a:rPr>
               <a:t>특이사항</a:t>
             </a:r>
-            <a:endParaRPr lang="en-US" sz="1100" dirty="0"/>
+            <a:endParaRPr lang="en-US" sz="1210" dirty="0"/>
           </a:p>
         </p:txBody>
       </p:sp>
@@ -6310,8 +6310,8 @@
         </p:nvSpPr>
         <p:spPr>
           <a:xfrm>
-            <a:off x="1320668" y="5940674"/>
-            <a:ext cx="10277490" cy="398496"/>
+            <a:off x="1411011" y="5893034"/>
+            <a:ext cx="10166665" cy="436535"/>
           </a:xfrm>
           <a:prstGeom prst="rect">
             <a:avLst/>
@@ -6323,18 +6323,18 @@
           <a:bodyPr wrap="square" lIns="0" tIns="0" rIns="0" bIns="0" rtlCol="0" anchor="ctr"/>
           <a:lstStyle/>
           <a:p>
-            <a:pPr algn="l" marL="152400" indent="-152400">
+            <a:pPr algn="l" marL="177800" indent="-177800">
               <a:lnSpc>
                 <a:spcPct val="125000"/>
               </a:lnSpc>
               <a:spcAft>
-                <a:spcPts val="414"/>
+                <a:spcPts val="452"/>
               </a:spcAft>
               <a:buSzPct val="100000"/>
               <a:buChar char="•"/>
             </a:pPr>
             <a:r>
-              <a:rPr lang="en-US" sz="1050" spc="-80" kern="0" dirty="0">
+              <a:rPr lang="en-US" sz="1150" spc="-80" kern="0" dirty="0">
                 <a:solidFill>
                   <a:srgbClr val="8297BC"/>
                 </a:solidFill>
@@ -6344,10 +6344,10 @@
               </a:rPr>
               <a:t>저장·공유 중심의 실용 정보형 릴스가 도달 확대를 견인</a:t>
             </a:r>
-            <a:endParaRPr lang="en-US" sz="1050" dirty="0"/>
-          </a:p>
-          <a:p>
-            <a:pPr algn="l" marL="152400" indent="-152400">
+            <a:endParaRPr lang="en-US" sz="1150" dirty="0"/>
+          </a:p>
+          <a:p>
+            <a:pPr algn="l" marL="177800" indent="-177800">
               <a:lnSpc>
                 <a:spcPct val="125000"/>
               </a:lnSpc>
@@ -6355,7 +6355,7 @@
               <a:buChar char="•"/>
             </a:pPr>
             <a:r>
-              <a:rPr lang="en-US" sz="1050" spc="-80" kern="0" dirty="0">
+              <a:rPr lang="en-US" sz="1150" spc="-80" kern="0" dirty="0">
                 <a:solidFill>
                   <a:srgbClr val="8297BC"/>
                 </a:solidFill>
@@ -6365,7 +6365,7 @@
               </a:rPr>
               <a:t>[입력 필요: 9월 협업 크리에이터 일정]</a:t>
             </a:r>
-            <a:endParaRPr lang="en-US" sz="1050" dirty="0"/>
+            <a:endParaRPr lang="en-US" sz="1150" dirty="0"/>
           </a:p>
         </p:txBody>
       </p:sp>
